--- a/reports/streamcab_presentation.pptx
+++ b/reports/streamcab_presentation.pptx
@@ -2185,7 +2185,7 @@
               <a:t>April</a:t>
             </a:r>
             <a:r>
-              <a:rPr dirty="0" sz="1000" spc="125">
+              <a:rPr dirty="0" sz="1000" spc="100">
                 <a:solidFill>
                   <a:srgbClr val="22373A"/>
                 </a:solidFill>
@@ -2202,10 +2202,10 @@
                 <a:latin typeface="Calibri"/>
                 <a:cs typeface="Calibri"/>
               </a:rPr>
-              <a:t>20,</a:t>
-            </a:r>
-            <a:r>
-              <a:rPr dirty="0" sz="1000" spc="125">
+              <a:t>22,</a:t>
+            </a:r>
+            <a:r>
+              <a:rPr dirty="0" sz="1000" spc="105">
                 <a:solidFill>
                   <a:srgbClr val="22373A"/>
                 </a:solidFill>
@@ -4496,7 +4496,7 @@
               <a:t>Persist</a:t>
             </a:r>
             <a:r>
-              <a:rPr dirty="0" sz="1100" spc="120" b="1">
+              <a:rPr dirty="0" sz="1100" spc="155" b="1">
                 <a:solidFill>
                   <a:srgbClr val="22373A"/>
                 </a:solidFill>
@@ -4516,7 +4516,7 @@
               <a:t>—</a:t>
             </a:r>
             <a:r>
-              <a:rPr dirty="0" sz="1100" spc="125">
+              <a:rPr dirty="0" sz="1100" spc="160">
                 <a:solidFill>
                   <a:srgbClr val="22373A"/>
                 </a:solidFill>
@@ -4536,7 +4536,7 @@
               <a:t>consumer</a:t>
             </a:r>
             <a:r>
-              <a:rPr dirty="0" sz="1100" spc="125">
+              <a:rPr dirty="0" sz="1100" spc="155">
                 <a:solidFill>
                   <a:srgbClr val="22373A"/>
                 </a:solidFill>
@@ -4556,7 +4556,87 @@
               <a:t>writes</a:t>
             </a:r>
             <a:r>
-              <a:rPr dirty="0" sz="1100" spc="125">
+              <a:rPr dirty="0" sz="1100" spc="160">
+                <a:solidFill>
+                  <a:srgbClr val="22373A"/>
+                </a:solidFill>
+                <a:latin typeface="Calibri"/>
+                <a:cs typeface="Calibri"/>
+              </a:rPr>
+              <a:t> </a:t>
+            </a:r>
+            <a:r>
+              <a:rPr dirty="0" sz="1100">
+                <a:solidFill>
+                  <a:srgbClr val="22373A"/>
+                </a:solidFill>
+                <a:latin typeface="Calibri"/>
+                <a:cs typeface="Calibri"/>
+              </a:rPr>
+              <a:t>window</a:t>
+            </a:r>
+            <a:r>
+              <a:rPr dirty="0" sz="1100" spc="155">
+                <a:solidFill>
+                  <a:srgbClr val="22373A"/>
+                </a:solidFill>
+                <a:latin typeface="Calibri"/>
+                <a:cs typeface="Calibri"/>
+              </a:rPr>
+              <a:t> </a:t>
+            </a:r>
+            <a:r>
+              <a:rPr dirty="0" sz="1100" spc="55">
+                <a:solidFill>
+                  <a:srgbClr val="22373A"/>
+                </a:solidFill>
+                <a:latin typeface="Calibri"/>
+                <a:cs typeface="Calibri"/>
+              </a:rPr>
+              <a:t>stats</a:t>
+            </a:r>
+            <a:r>
+              <a:rPr dirty="0" sz="1100" spc="160">
+                <a:solidFill>
+                  <a:srgbClr val="22373A"/>
+                </a:solidFill>
+                <a:latin typeface="Calibri"/>
+                <a:cs typeface="Calibri"/>
+              </a:rPr>
+              <a:t> </a:t>
+            </a:r>
+            <a:r>
+              <a:rPr dirty="0" sz="1100">
+                <a:solidFill>
+                  <a:srgbClr val="22373A"/>
+                </a:solidFill>
+                <a:latin typeface="Calibri"/>
+                <a:cs typeface="Calibri"/>
+              </a:rPr>
+              <a:t>to</a:t>
+            </a:r>
+            <a:r>
+              <a:rPr dirty="0" sz="1100" spc="155">
+                <a:solidFill>
+                  <a:srgbClr val="22373A"/>
+                </a:solidFill>
+                <a:latin typeface="Calibri"/>
+                <a:cs typeface="Calibri"/>
+              </a:rPr>
+              <a:t> </a:t>
+            </a:r>
+            <a:r>
+              <a:rPr dirty="0" sz="1100" spc="60">
+                <a:solidFill>
+                  <a:srgbClr val="22373A"/>
+                </a:solidFill>
+                <a:latin typeface="Calibri"/>
+                <a:cs typeface="Calibri"/>
+              </a:rPr>
+              <a:t>a</a:t>
+            </a:r>
+            <a:r>
+              <a:rPr dirty="0" sz="1100" spc="160">
                 <a:solidFill>
                   <a:srgbClr val="22373A"/>
                 </a:solidFill>
@@ -4570,90 +4650,10 @@
                 <a:solidFill>
                   <a:srgbClr val="22373A"/>
                 </a:solidFill>
-                <a:latin typeface="Courier New"/>
-                <a:cs typeface="Courier New"/>
-              </a:rPr>
-              <a:t>live_trips</a:t>
-            </a:r>
-            <a:r>
-              <a:rPr dirty="0" sz="1100" spc="-10">
-                <a:solidFill>
-                  <a:srgbClr val="22373A"/>
-                </a:solidFill>
-                <a:latin typeface="Calibri"/>
-                <a:cs typeface="Calibri"/>
-              </a:rPr>
-              <a:t>;</a:t>
-            </a:r>
-            <a:r>
-              <a:rPr dirty="0" sz="1100" spc="125">
-                <a:solidFill>
-                  <a:srgbClr val="22373A"/>
-                </a:solidFill>
-                <a:latin typeface="Calibri"/>
-                <a:cs typeface="Calibri"/>
-              </a:rPr>
-              <a:t> </a:t>
-            </a:r>
-            <a:r>
-              <a:rPr dirty="0" sz="1100" spc="55">
-                <a:solidFill>
-                  <a:srgbClr val="22373A"/>
-                </a:solidFill>
-                <a:latin typeface="Calibri"/>
-                <a:cs typeface="Calibri"/>
-              </a:rPr>
-              <a:t>Spark</a:t>
-            </a:r>
-            <a:r>
-              <a:rPr dirty="0" sz="1100" spc="125">
-                <a:solidFill>
-                  <a:srgbClr val="22373A"/>
-                </a:solidFill>
-                <a:latin typeface="Calibri"/>
-                <a:cs typeface="Calibri"/>
-              </a:rPr>
-              <a:t> </a:t>
-            </a:r>
-            <a:r>
-              <a:rPr dirty="0" sz="1100" spc="50">
-                <a:solidFill>
-                  <a:srgbClr val="22373A"/>
-                </a:solidFill>
-                <a:latin typeface="Calibri"/>
-                <a:cs typeface="Calibri"/>
-              </a:rPr>
-              <a:t>upserts</a:t>
-            </a:r>
-            <a:r>
-              <a:rPr dirty="0" sz="1100" spc="125">
-                <a:solidFill>
-                  <a:srgbClr val="22373A"/>
-                </a:solidFill>
-                <a:latin typeface="Calibri"/>
-                <a:cs typeface="Calibri"/>
-              </a:rPr>
-              <a:t> </a:t>
-            </a:r>
-            <a:r>
-              <a:rPr dirty="0" sz="1100" spc="-10">
-                <a:solidFill>
-                  <a:srgbClr val="22373A"/>
-                </a:solidFill>
-                <a:latin typeface="Courier New"/>
-                <a:cs typeface="Courier New"/>
-              </a:rPr>
-              <a:t>traffic_agg</a:t>
-            </a:r>
-            <a:r>
-              <a:rPr dirty="0" sz="1100" spc="-10">
-                <a:solidFill>
-                  <a:srgbClr val="22373A"/>
-                </a:solidFill>
-                <a:latin typeface="Calibri"/>
-                <a:cs typeface="Calibri"/>
-              </a:rPr>
-              <a:t>.</a:t>
+                <a:latin typeface="Calibri"/>
+                <a:cs typeface="Calibri"/>
+              </a:rPr>
+              <a:t>table.</a:t>
             </a:r>
             <a:endParaRPr sz="1100">
               <a:latin typeface="Calibri"/>
@@ -4685,7 +4685,7 @@
               <a:t>Train</a:t>
             </a:r>
             <a:r>
-              <a:rPr dirty="0" sz="1100" spc="160" b="1">
+              <a:rPr dirty="0" sz="1100" spc="135" b="1">
                 <a:solidFill>
                   <a:srgbClr val="22373A"/>
                 </a:solidFill>
@@ -4705,7 +4705,7 @@
               <a:t>—</a:t>
             </a:r>
             <a:r>
-              <a:rPr dirty="0" sz="1100" spc="160">
+              <a:rPr dirty="0" sz="1100" spc="140">
                 <a:solidFill>
                   <a:srgbClr val="22373A"/>
                 </a:solidFill>
@@ -4725,7 +4725,7 @@
               <a:t>XGBoost</a:t>
             </a:r>
             <a:r>
-              <a:rPr dirty="0" sz="1100" spc="160">
+              <a:rPr dirty="0" sz="1100" spc="140">
                 <a:solidFill>
                   <a:srgbClr val="22373A"/>
                 </a:solidFill>
@@ -4745,7 +4745,7 @@
               <a:t>reads</a:t>
             </a:r>
             <a:r>
-              <a:rPr dirty="0" sz="1100" spc="160">
+              <a:rPr dirty="0" sz="1100" spc="140">
                 <a:solidFill>
                   <a:srgbClr val="22373A"/>
                 </a:solidFill>
@@ -4765,7 +4765,7 @@
               <a:t>aggregates</a:t>
             </a:r>
             <a:r>
-              <a:rPr dirty="0" sz="1100" spc="160">
+              <a:rPr dirty="0" sz="1100" spc="140">
                 <a:solidFill>
                   <a:srgbClr val="22373A"/>
                 </a:solidFill>
@@ -4785,37 +4785,27 @@
               <a:t>in</a:t>
             </a:r>
             <a:r>
-              <a:rPr dirty="0" sz="1100" spc="160">
-                <a:solidFill>
-                  <a:srgbClr val="22373A"/>
-                </a:solidFill>
-                <a:latin typeface="Calibri"/>
-                <a:cs typeface="Calibri"/>
-              </a:rPr>
-              <a:t> </a:t>
-            </a:r>
-            <a:r>
-              <a:rPr dirty="0" sz="1100" spc="45">
-                <a:solidFill>
-                  <a:srgbClr val="22373A"/>
-                </a:solidFill>
-                <a:latin typeface="Calibri"/>
-                <a:cs typeface="Calibri"/>
-              </a:rPr>
-              <a:t>memory-</a:t>
-            </a:r>
-            <a:r>
-              <a:rPr dirty="0" sz="1100">
-                <a:solidFill>
-                  <a:srgbClr val="22373A"/>
-                </a:solidFill>
-                <a:latin typeface="Calibri"/>
-                <a:cs typeface="Calibri"/>
-              </a:rPr>
-              <a:t>aware</a:t>
-            </a:r>
-            <a:r>
-              <a:rPr dirty="0" sz="1100" spc="160">
+              <a:rPr dirty="0" sz="1100" spc="135">
+                <a:solidFill>
+                  <a:srgbClr val="22373A"/>
+                </a:solidFill>
+                <a:latin typeface="Calibri"/>
+                <a:cs typeface="Calibri"/>
+              </a:rPr>
+              <a:t> </a:t>
+            </a:r>
+            <a:r>
+              <a:rPr dirty="0" sz="1100" spc="60">
+                <a:solidFill>
+                  <a:srgbClr val="22373A"/>
+                </a:solidFill>
+                <a:latin typeface="Calibri"/>
+                <a:cs typeface="Calibri"/>
+              </a:rPr>
+              <a:t>small</a:t>
+            </a:r>
+            <a:r>
+              <a:rPr dirty="0" sz="1100" spc="140">
                 <a:solidFill>
                   <a:srgbClr val="22373A"/>
                 </a:solidFill>
@@ -4864,7 +4854,7 @@
               <a:t>Predict</a:t>
             </a:r>
             <a:r>
-              <a:rPr dirty="0" sz="1100" spc="215" b="1">
+              <a:rPr dirty="0" sz="1100" spc="250" b="1">
                 <a:solidFill>
                   <a:srgbClr val="22373A"/>
                 </a:solidFill>
@@ -4884,7 +4874,7 @@
               <a:t>—</a:t>
             </a:r>
             <a:r>
-              <a:rPr dirty="0" sz="1100" spc="215">
+              <a:rPr dirty="0" sz="1100" spc="250">
                 <a:solidFill>
                   <a:srgbClr val="22373A"/>
                 </a:solidFill>
@@ -4904,7 +4894,7 @@
               <a:t>predictor</a:t>
             </a:r>
             <a:r>
-              <a:rPr dirty="0" sz="1100" spc="215">
+              <a:rPr dirty="0" sz="1100" spc="254">
                 <a:solidFill>
                   <a:srgbClr val="22373A"/>
                 </a:solidFill>
@@ -4924,7 +4914,7 @@
               <a:t>scores</a:t>
             </a:r>
             <a:r>
-              <a:rPr dirty="0" sz="1100" spc="215">
+              <a:rPr dirty="0" sz="1100" spc="250">
                 <a:solidFill>
                   <a:srgbClr val="22373A"/>
                 </a:solidFill>
@@ -4941,87 +4931,27 @@
                 <a:latin typeface="Calibri"/>
                 <a:cs typeface="Calibri"/>
               </a:rPr>
-              <a:t>latest</a:t>
-            </a:r>
-            <a:r>
-              <a:rPr dirty="0" sz="1100" spc="215">
-                <a:solidFill>
-                  <a:srgbClr val="22373A"/>
-                </a:solidFill>
-                <a:latin typeface="Calibri"/>
-                <a:cs typeface="Calibri"/>
-              </a:rPr>
-              <a:t> </a:t>
-            </a:r>
-            <a:r>
-              <a:rPr dirty="0" sz="1100">
-                <a:solidFill>
-                  <a:srgbClr val="22373A"/>
-                </a:solidFill>
-                <a:latin typeface="Calibri"/>
-                <a:cs typeface="Calibri"/>
-              </a:rPr>
-              <a:t>windows</a:t>
-            </a:r>
-            <a:r>
-              <a:rPr dirty="0" sz="1100" spc="215">
-                <a:solidFill>
-                  <a:srgbClr val="22373A"/>
-                </a:solidFill>
-                <a:latin typeface="Calibri"/>
-                <a:cs typeface="Calibri"/>
-              </a:rPr>
-              <a:t> </a:t>
-            </a:r>
-            <a:r>
-              <a:rPr dirty="0" sz="1100">
-                <a:solidFill>
-                  <a:srgbClr val="22373A"/>
-                </a:solidFill>
-                <a:latin typeface="Calibri"/>
-                <a:cs typeface="Calibri"/>
-              </a:rPr>
-              <a:t>every</a:t>
-            </a:r>
-            <a:r>
-              <a:rPr dirty="0" sz="1100" spc="215">
-                <a:solidFill>
-                  <a:srgbClr val="22373A"/>
-                </a:solidFill>
-                <a:latin typeface="Calibri"/>
-                <a:cs typeface="Calibri"/>
-              </a:rPr>
-              <a:t> </a:t>
-            </a:r>
-            <a:r>
-              <a:rPr dirty="0" sz="1100">
-                <a:solidFill>
-                  <a:srgbClr val="22373A"/>
-                </a:solidFill>
-                <a:latin typeface="Calibri"/>
-                <a:cs typeface="Calibri"/>
-              </a:rPr>
-              <a:t>30</a:t>
-            </a:r>
-            <a:r>
-              <a:rPr dirty="0" sz="1100" spc="215">
-                <a:solidFill>
-                  <a:srgbClr val="22373A"/>
-                </a:solidFill>
-                <a:latin typeface="Calibri"/>
-                <a:cs typeface="Calibri"/>
-              </a:rPr>
-              <a:t> </a:t>
-            </a:r>
-            <a:r>
-              <a:rPr dirty="0" sz="1100" spc="-25">
-                <a:solidFill>
-                  <a:srgbClr val="22373A"/>
-                </a:solidFill>
-                <a:latin typeface="Calibri"/>
-                <a:cs typeface="Calibri"/>
-              </a:rPr>
-              <a:t>s.</a:t>
+              <a:t>real-time</a:t>
+            </a:r>
+            <a:r>
+              <a:rPr dirty="0" sz="1100" spc="254">
+                <a:solidFill>
+                  <a:srgbClr val="22373A"/>
+                </a:solidFill>
+                <a:latin typeface="Calibri"/>
+                <a:cs typeface="Calibri"/>
+              </a:rPr>
+              <a:t> </a:t>
+            </a:r>
+            <a:r>
+              <a:rPr dirty="0" sz="1100" spc="-10">
+                <a:solidFill>
+                  <a:srgbClr val="22373A"/>
+                </a:solidFill>
+                <a:latin typeface="Calibri"/>
+                <a:cs typeface="Calibri"/>
+              </a:rPr>
+              <a:t>windows.</a:t>
             </a:r>
             <a:endParaRPr sz="1100">
               <a:latin typeface="Calibri"/>
@@ -5305,7 +5235,7 @@
         </p:nvSpPr>
         <p:spPr>
           <a:xfrm>
-            <a:off x="179895" y="884438"/>
+            <a:off x="179895" y="997328"/>
             <a:ext cx="1683385" cy="930910"/>
           </a:xfrm>
           <a:prstGeom prst="rect">
@@ -5497,8 +5427,8 @@
         </p:nvSpPr>
         <p:spPr>
           <a:xfrm>
-            <a:off x="2035695" y="900808"/>
-            <a:ext cx="1647189" cy="1600835"/>
+            <a:off x="2035695" y="1013673"/>
+            <a:ext cx="1575435" cy="1167130"/>
           </a:xfrm>
           <a:prstGeom prst="rect">
             <a:avLst/>
@@ -5616,91 +5546,12 @@
             </a:endParaRPr>
           </a:p>
           <a:p>
-            <a:pPr marL="289560" marR="5080" indent="-114300">
-              <a:lnSpc>
-                <a:spcPct val="118000"/>
-              </a:lnSpc>
-              <a:spcBef>
-                <a:spcPts val="295"/>
-              </a:spcBef>
-              <a:buFont typeface="Calibri"/>
-              <a:buChar char="•"/>
-              <a:tabLst>
-                <a:tab pos="289560" algn="l"/>
-              </a:tabLst>
-            </a:pPr>
-            <a:r>
-              <a:rPr dirty="0" sz="1100" spc="-20">
-                <a:solidFill>
-                  <a:srgbClr val="22373A"/>
-                </a:solidFill>
-                <a:latin typeface="Courier New"/>
-                <a:cs typeface="Courier New"/>
-              </a:rPr>
-              <a:t>live_trips</a:t>
-            </a:r>
-            <a:r>
-              <a:rPr dirty="0" sz="1100" spc="-345">
-                <a:solidFill>
-                  <a:srgbClr val="22373A"/>
-                </a:solidFill>
-                <a:latin typeface="Courier New"/>
-                <a:cs typeface="Courier New"/>
-              </a:rPr>
-              <a:t> </a:t>
-            </a:r>
-            <a:r>
-              <a:rPr dirty="0" sz="1100" spc="50">
-                <a:solidFill>
-                  <a:srgbClr val="22373A"/>
-                </a:solidFill>
-                <a:latin typeface="Calibri"/>
-                <a:cs typeface="Calibri"/>
-              </a:rPr>
-              <a:t>table</a:t>
-            </a:r>
-            <a:r>
-              <a:rPr dirty="0" sz="1100" spc="75">
-                <a:solidFill>
-                  <a:srgbClr val="22373A"/>
-                </a:solidFill>
-                <a:latin typeface="Calibri"/>
-                <a:cs typeface="Calibri"/>
-              </a:rPr>
-              <a:t> </a:t>
-            </a:r>
-            <a:r>
-              <a:rPr dirty="0" sz="1100" spc="25">
-                <a:solidFill>
-                  <a:srgbClr val="22373A"/>
-                </a:solidFill>
-                <a:latin typeface="Calibri"/>
-                <a:cs typeface="Calibri"/>
-              </a:rPr>
-              <a:t>in </a:t>
-            </a:r>
-            <a:r>
-              <a:rPr dirty="0" sz="1100" spc="-25">
-                <a:solidFill>
-                  <a:srgbClr val="22373A"/>
-                </a:solidFill>
-                <a:latin typeface="Calibri"/>
-                <a:cs typeface="Calibri"/>
-              </a:rPr>
-              <a:t>DB</a:t>
-            </a:r>
-            <a:endParaRPr sz="1100">
-              <a:latin typeface="Calibri"/>
-              <a:cs typeface="Calibri"/>
-            </a:endParaRPr>
-          </a:p>
-          <a:p>
             <a:pPr marL="288925" indent="-113664">
               <a:lnSpc>
                 <a:spcPct val="100000"/>
               </a:lnSpc>
               <a:spcBef>
-                <a:spcPts val="540"/>
+                <a:spcPts val="535"/>
               </a:spcBef>
               <a:buFont typeface="Calibri"/>
               <a:buChar char="•"/>
@@ -5801,7 +5652,7 @@
         </p:nvSpPr>
         <p:spPr>
           <a:xfrm>
-            <a:off x="3891495" y="900808"/>
+            <a:off x="3891495" y="1013673"/>
             <a:ext cx="1575435" cy="1402715"/>
           </a:xfrm>
           <a:prstGeom prst="rect">
@@ -6124,8 +5975,8 @@
         </p:nvSpPr>
         <p:spPr>
           <a:xfrm>
-            <a:off x="227304" y="821014"/>
-            <a:ext cx="2264410" cy="1379855"/>
+            <a:off x="227304" y="999830"/>
+            <a:ext cx="2264410" cy="1380490"/>
           </a:xfrm>
           <a:prstGeom prst="rect">
             <a:avLst/>
@@ -6420,8 +6271,8 @@
         </p:nvSpPr>
         <p:spPr>
           <a:xfrm>
-            <a:off x="2987294" y="913332"/>
-            <a:ext cx="2393950" cy="1645285"/>
+            <a:off x="2987294" y="1092160"/>
+            <a:ext cx="2072639" cy="1219835"/>
           </a:xfrm>
           <a:prstGeom prst="rect">
             <a:avLst/>
@@ -6536,71 +6387,12 @@
             </a:endParaRPr>
           </a:p>
           <a:p>
-            <a:pPr marL="288290" marR="880744" indent="-109220">
-              <a:lnSpc>
-                <a:spcPct val="114599"/>
-              </a:lnSpc>
-              <a:spcBef>
-                <a:spcPts val="600"/>
-              </a:spcBef>
-              <a:buFont typeface="Calibri"/>
-              <a:buChar char="•"/>
-              <a:tabLst>
-                <a:tab pos="289560" algn="l"/>
-              </a:tabLst>
-            </a:pPr>
-            <a:r>
-              <a:rPr dirty="0" sz="1000" spc="-10">
-                <a:solidFill>
-                  <a:srgbClr val="22373A"/>
-                </a:solidFill>
-                <a:latin typeface="Courier New"/>
-                <a:cs typeface="Courier New"/>
-              </a:rPr>
-              <a:t>subsample=0.9</a:t>
-            </a:r>
-            <a:r>
-              <a:rPr dirty="0" sz="1000" spc="-10">
-                <a:solidFill>
-                  <a:srgbClr val="22373A"/>
-                </a:solidFill>
-                <a:latin typeface="Calibri"/>
-                <a:cs typeface="Calibri"/>
-              </a:rPr>
-              <a:t>, </a:t>
-            </a:r>
-            <a:r>
-              <a:rPr dirty="0" sz="1000" spc="-10">
-                <a:solidFill>
-                  <a:srgbClr val="22373A"/>
-                </a:solidFill>
-                <a:latin typeface="Calibri"/>
-                <a:cs typeface="Calibri"/>
-              </a:rPr>
-              <a:t>	</a:t>
-            </a:r>
-            <a:r>
-              <a:rPr dirty="0" sz="1000" spc="-10">
-                <a:solidFill>
-                  <a:srgbClr val="22373A"/>
-                </a:solidFill>
-                <a:latin typeface="Courier New"/>
-                <a:cs typeface="Courier New"/>
-              </a:rPr>
-              <a:t>tree_method=hist</a:t>
-            </a:r>
-            <a:endParaRPr sz="1000">
-              <a:latin typeface="Courier New"/>
-              <a:cs typeface="Courier New"/>
-            </a:endParaRPr>
-          </a:p>
-          <a:p>
             <a:pPr marL="288290" indent="-109220">
               <a:lnSpc>
                 <a:spcPct val="100000"/>
               </a:lnSpc>
               <a:spcBef>
-                <a:spcPts val="770"/>
+                <a:spcPts val="775"/>
               </a:spcBef>
               <a:buChar char="•"/>
               <a:tabLst>
@@ -6752,6 +6544,16 @@
               <a:t> </a:t>
             </a:r>
             <a:r>
+              <a:rPr dirty="0" sz="1100" spc="-20">
+                <a:solidFill>
+                  <a:srgbClr val="22373A"/>
+                </a:solidFill>
+                <a:latin typeface="Calibri"/>
+                <a:cs typeface="Calibri"/>
+              </a:rPr>
+              <a:t>mini </a:t>
+            </a:r>
+            <a:r>
               <a:rPr dirty="0" sz="1100" spc="-10">
                 <a:solidFill>
                   <a:srgbClr val="22373A"/>
@@ -6759,77 +6561,7 @@
                 <a:latin typeface="Calibri"/>
                 <a:cs typeface="Calibri"/>
               </a:rPr>
-              <a:t>batches; </a:t>
-            </a:r>
-            <a:r>
-              <a:rPr dirty="0" sz="1100" spc="20">
-                <a:solidFill>
-                  <a:srgbClr val="22373A"/>
-                </a:solidFill>
-                <a:latin typeface="Calibri"/>
-                <a:cs typeface="Calibri"/>
-              </a:rPr>
-              <a:t>continued</a:t>
-            </a:r>
-            <a:r>
-              <a:rPr dirty="0" sz="1100" spc="120">
-                <a:solidFill>
-                  <a:srgbClr val="22373A"/>
-                </a:solidFill>
-                <a:latin typeface="Calibri"/>
-                <a:cs typeface="Calibri"/>
-              </a:rPr>
-              <a:t> </a:t>
-            </a:r>
-            <a:r>
-              <a:rPr dirty="0" sz="1100" spc="55">
-                <a:solidFill>
-                  <a:srgbClr val="22373A"/>
-                </a:solidFill>
-                <a:latin typeface="Calibri"/>
-                <a:cs typeface="Calibri"/>
-              </a:rPr>
-              <a:t>boosting</a:t>
-            </a:r>
-            <a:r>
-              <a:rPr dirty="0" sz="1100" spc="125">
-                <a:solidFill>
-                  <a:srgbClr val="22373A"/>
-                </a:solidFill>
-                <a:latin typeface="Calibri"/>
-                <a:cs typeface="Calibri"/>
-              </a:rPr>
-              <a:t> </a:t>
-            </a:r>
-            <a:r>
-              <a:rPr dirty="0" sz="1100" spc="20">
-                <a:solidFill>
-                  <a:srgbClr val="22373A"/>
-                </a:solidFill>
-                <a:latin typeface="Calibri"/>
-                <a:cs typeface="Calibri"/>
-              </a:rPr>
-              <a:t>(+40</a:t>
-            </a:r>
-            <a:r>
-              <a:rPr dirty="0" sz="1100" spc="125">
-                <a:solidFill>
-                  <a:srgbClr val="22373A"/>
-                </a:solidFill>
-                <a:latin typeface="Calibri"/>
-                <a:cs typeface="Calibri"/>
-              </a:rPr>
-              <a:t> </a:t>
-            </a:r>
-            <a:r>
-              <a:rPr dirty="0" sz="1100" spc="-10">
-                <a:solidFill>
-                  <a:srgbClr val="22373A"/>
-                </a:solidFill>
-                <a:latin typeface="Calibri"/>
-                <a:cs typeface="Calibri"/>
-              </a:rPr>
-              <a:t>trees/batch);</a:t>
+              <a:t>batches;</a:t>
             </a:r>
             <a:endParaRPr sz="1100">
               <a:latin typeface="Calibri"/>
@@ -15328,14 +15060,14 @@
               <a:t> </a:t>
             </a:r>
             <a:r>
-              <a:rPr dirty="0" sz="1100" spc="50">
-                <a:solidFill>
-                  <a:srgbClr val="22373A"/>
-                </a:solidFill>
-                <a:latin typeface="Calibri"/>
-                <a:cs typeface="Calibri"/>
-              </a:rPr>
-              <a:t>billions</a:t>
+              <a:rPr dirty="0" sz="1100" spc="45">
+                <a:solidFill>
+                  <a:srgbClr val="22373A"/>
+                </a:solidFill>
+                <a:latin typeface="Calibri"/>
+                <a:cs typeface="Calibri"/>
+              </a:rPr>
+              <a:t>billion</a:t>
             </a:r>
             <a:endParaRPr sz="1100">
               <a:latin typeface="Calibri"/>
@@ -16506,14 +16238,64 @@
       </p:sp>
       <p:sp>
         <p:nvSpPr>
+          <p:cNvPr id="6" name="object 6"/>
+          <p:cNvSpPr txBox="1">
+            <a:spLocks noGrp="1"/>
+          </p:cNvSpPr>
+          <p:nvPr>
+            <p:ph type="sldNum" idx="7" sz="quarter"/>
+          </p:nvPr>
+        </p:nvSpPr>
+        <p:spPr>
+          <a:prstGeom prst="rect"/>
+        </p:spPr>
+        <p:txBody>
+          <a:bodyPr wrap="square" lIns="0" tIns="22860" rIns="0" bIns="0" rtlCol="0" vert="horz">
+            <a:spAutoFit/>
+          </a:bodyPr>
+          <a:lstStyle/>
+          <a:p>
+            <a:pPr marL="12700">
+              <a:lnSpc>
+                <a:spcPct val="100000"/>
+              </a:lnSpc>
+              <a:spcBef>
+                <a:spcPts val="180"/>
+              </a:spcBef>
+            </a:pPr>
+            <a:r>
+              <a:rPr dirty="0" spc="-10"/>
+              <a:t>6</a:t>
+            </a:r>
+            <a:r>
+              <a:rPr dirty="0" spc="-50"/>
+              <a:t> </a:t>
+            </a:r>
+            <a:r>
+              <a:rPr dirty="0" spc="100"/>
+              <a:t>/</a:t>
+            </a:r>
+            <a:r>
+              <a:rPr dirty="0" spc="-50"/>
+              <a:t> </a:t>
+            </a:r>
+            <a:r>
+              <a:rPr dirty="0" spc="-25"/>
+              <a:t>15</a:t>
+            </a:r>
+          </a:p>
+        </p:txBody>
+      </p:sp>
+      <p:sp>
+        <p:nvSpPr>
           <p:cNvPr id="3" name="object 3"/>
           <p:cNvSpPr txBox="1"/>
           <p:nvPr/>
         </p:nvSpPr>
         <p:spPr>
           <a:xfrm>
-            <a:off x="227304" y="520989"/>
-            <a:ext cx="2201545" cy="1798320"/>
+            <a:off x="227304" y="644573"/>
+            <a:ext cx="1632585" cy="1798320"/>
           </a:xfrm>
           <a:prstGeom prst="rect">
             <a:avLst/>
@@ -16589,7 +16371,7 @@
             </a:endParaRPr>
           </a:p>
           <a:p>
-            <a:pPr marL="289560" marR="573405" indent="-114300">
+            <a:pPr marL="289560" marR="5080" indent="-114300">
               <a:lnSpc>
                 <a:spcPct val="118000"/>
               </a:lnSpc>
@@ -16631,6 +16413,327 @@
                 <a:cs typeface="Courier New"/>
               </a:rPr>
               <a:t>dropoff_datetime</a:t>
+            </a:r>
+            <a:endParaRPr sz="1100">
+              <a:latin typeface="Courier New"/>
+              <a:cs typeface="Courier New"/>
+            </a:endParaRPr>
+          </a:p>
+          <a:p>
+            <a:pPr marL="289560" marR="54610" indent="-114300">
+              <a:lnSpc>
+                <a:spcPct val="118000"/>
+              </a:lnSpc>
+              <a:spcBef>
+                <a:spcPts val="300"/>
+              </a:spcBef>
+              <a:buFont typeface="Calibri"/>
+              <a:buChar char="•"/>
+              <a:tabLst>
+                <a:tab pos="289560" algn="l"/>
+              </a:tabLst>
+            </a:pPr>
+            <a:r>
+              <a:rPr dirty="0" sz="1100" spc="-20">
+                <a:solidFill>
+                  <a:srgbClr val="22373A"/>
+                </a:solidFill>
+                <a:latin typeface="Courier New"/>
+                <a:cs typeface="Courier New"/>
+              </a:rPr>
+              <a:t>passenger_count</a:t>
+            </a:r>
+            <a:r>
+              <a:rPr dirty="0" sz="1100" spc="-20">
+                <a:solidFill>
+                  <a:srgbClr val="22373A"/>
+                </a:solidFill>
+                <a:latin typeface="Calibri"/>
+                <a:cs typeface="Calibri"/>
+              </a:rPr>
+              <a:t>, </a:t>
+            </a:r>
+            <a:r>
+              <a:rPr dirty="0" sz="1100" spc="-10">
+                <a:solidFill>
+                  <a:srgbClr val="22373A"/>
+                </a:solidFill>
+                <a:latin typeface="Courier New"/>
+                <a:cs typeface="Courier New"/>
+              </a:rPr>
+              <a:t>trip_distance</a:t>
+            </a:r>
+            <a:endParaRPr sz="1100">
+              <a:latin typeface="Courier New"/>
+              <a:cs typeface="Courier New"/>
+            </a:endParaRPr>
+          </a:p>
+          <a:p>
+            <a:pPr marL="289560" marR="137795" indent="-114300">
+              <a:lnSpc>
+                <a:spcPct val="118000"/>
+              </a:lnSpc>
+              <a:spcBef>
+                <a:spcPts val="300"/>
+              </a:spcBef>
+              <a:buFont typeface="Calibri"/>
+              <a:buChar char="•"/>
+              <a:tabLst>
+                <a:tab pos="289560" algn="l"/>
+              </a:tabLst>
+            </a:pPr>
+            <a:r>
+              <a:rPr dirty="0" sz="1100" spc="-20">
+                <a:solidFill>
+                  <a:srgbClr val="22373A"/>
+                </a:solidFill>
+                <a:latin typeface="Courier New"/>
+                <a:cs typeface="Courier New"/>
+              </a:rPr>
+              <a:t>pu_location_id</a:t>
+            </a:r>
+            <a:r>
+              <a:rPr dirty="0" sz="1100" spc="-20">
+                <a:solidFill>
+                  <a:srgbClr val="22373A"/>
+                </a:solidFill>
+                <a:latin typeface="Calibri"/>
+                <a:cs typeface="Calibri"/>
+              </a:rPr>
+              <a:t>, </a:t>
+            </a:r>
+            <a:r>
+              <a:rPr dirty="0" sz="1100" spc="-10">
+                <a:solidFill>
+                  <a:srgbClr val="22373A"/>
+                </a:solidFill>
+                <a:latin typeface="Courier New"/>
+                <a:cs typeface="Courier New"/>
+              </a:rPr>
+              <a:t>do_location_id</a:t>
+            </a:r>
+            <a:endParaRPr sz="1100">
+              <a:latin typeface="Courier New"/>
+              <a:cs typeface="Courier New"/>
+            </a:endParaRPr>
+          </a:p>
+          <a:p>
+            <a:pPr marL="288925" indent="-113664">
+              <a:lnSpc>
+                <a:spcPct val="100000"/>
+              </a:lnSpc>
+              <a:spcBef>
+                <a:spcPts val="540"/>
+              </a:spcBef>
+              <a:buFont typeface="Calibri"/>
+              <a:buChar char="•"/>
+              <a:tabLst>
+                <a:tab pos="288925" algn="l"/>
+              </a:tabLst>
+            </a:pPr>
+            <a:r>
+              <a:rPr dirty="0" sz="1100" spc="-10">
+                <a:solidFill>
+                  <a:srgbClr val="22373A"/>
+                </a:solidFill>
+                <a:latin typeface="Courier New"/>
+                <a:cs typeface="Courier New"/>
+              </a:rPr>
+              <a:t>total_amount</a:t>
+            </a:r>
+            <a:endParaRPr sz="1100">
+              <a:latin typeface="Courier New"/>
+              <a:cs typeface="Courier New"/>
+            </a:endParaRPr>
+          </a:p>
+        </p:txBody>
+      </p:sp>
+      <p:sp>
+        <p:nvSpPr>
+          <p:cNvPr id="4" name="object 4"/>
+          <p:cNvSpPr txBox="1"/>
+          <p:nvPr/>
+        </p:nvSpPr>
+        <p:spPr>
+          <a:xfrm>
+            <a:off x="2987294" y="651799"/>
+            <a:ext cx="2367915" cy="1600835"/>
+          </a:xfrm>
+          <a:prstGeom prst="rect">
+            <a:avLst/>
+          </a:prstGeom>
+        </p:spPr>
+        <p:txBody>
+          <a:bodyPr wrap="square" lIns="0" tIns="80645" rIns="0" bIns="0" rtlCol="0" vert="horz">
+            <a:spAutoFit/>
+          </a:bodyPr>
+          <a:lstStyle/>
+          <a:p>
+            <a:pPr marL="12700">
+              <a:lnSpc>
+                <a:spcPct val="100000"/>
+              </a:lnSpc>
+              <a:spcBef>
+                <a:spcPts val="635"/>
+              </a:spcBef>
+            </a:pPr>
+            <a:r>
+              <a:rPr dirty="0" sz="1100" b="1">
+                <a:solidFill>
+                  <a:srgbClr val="22373A"/>
+                </a:solidFill>
+                <a:latin typeface="Calibri"/>
+                <a:cs typeface="Calibri"/>
+              </a:rPr>
+              <a:t>Windowed</a:t>
+            </a:r>
+            <a:r>
+              <a:rPr dirty="0" sz="1100" spc="120" b="1">
+                <a:solidFill>
+                  <a:srgbClr val="22373A"/>
+                </a:solidFill>
+                <a:latin typeface="Calibri"/>
+                <a:cs typeface="Calibri"/>
+              </a:rPr>
+              <a:t> </a:t>
+            </a:r>
+            <a:r>
+              <a:rPr dirty="0" sz="1100" spc="45" b="1">
+                <a:solidFill>
+                  <a:srgbClr val="22373A"/>
+                </a:solidFill>
+                <a:latin typeface="Calibri"/>
+                <a:cs typeface="Calibri"/>
+              </a:rPr>
+              <a:t>aggregate</a:t>
+            </a:r>
+            <a:r>
+              <a:rPr dirty="0" sz="1100" spc="120" b="1">
+                <a:solidFill>
+                  <a:srgbClr val="22373A"/>
+                </a:solidFill>
+                <a:latin typeface="Calibri"/>
+                <a:cs typeface="Calibri"/>
+              </a:rPr>
+              <a:t> </a:t>
+            </a:r>
+            <a:r>
+              <a:rPr dirty="0" sz="1100" spc="-10" b="1">
+                <a:solidFill>
+                  <a:srgbClr val="22373A"/>
+                </a:solidFill>
+                <a:latin typeface="Calibri"/>
+                <a:cs typeface="Calibri"/>
+              </a:rPr>
+              <a:t>fields</a:t>
+            </a:r>
+            <a:endParaRPr sz="1100">
+              <a:latin typeface="Calibri"/>
+              <a:cs typeface="Calibri"/>
+            </a:endParaRPr>
+          </a:p>
+          <a:p>
+            <a:pPr marL="288925" indent="-113664">
+              <a:lnSpc>
+                <a:spcPct val="100000"/>
+              </a:lnSpc>
+              <a:spcBef>
+                <a:spcPts val="540"/>
+              </a:spcBef>
+              <a:buFont typeface="Calibri"/>
+              <a:buChar char="•"/>
+              <a:tabLst>
+                <a:tab pos="288925" algn="l"/>
+              </a:tabLst>
+            </a:pPr>
+            <a:r>
+              <a:rPr dirty="0" sz="1100" spc="-10">
+                <a:solidFill>
+                  <a:srgbClr val="22373A"/>
+                </a:solidFill>
+                <a:latin typeface="Courier New"/>
+                <a:cs typeface="Courier New"/>
+              </a:rPr>
+              <a:t>window_start</a:t>
+            </a:r>
+            <a:r>
+              <a:rPr dirty="0" sz="1100" spc="-10">
+                <a:solidFill>
+                  <a:srgbClr val="22373A"/>
+                </a:solidFill>
+                <a:latin typeface="Calibri"/>
+                <a:cs typeface="Calibri"/>
+              </a:rPr>
+              <a:t>,</a:t>
+            </a:r>
+            <a:r>
+              <a:rPr dirty="0" sz="1100" spc="-5">
+                <a:solidFill>
+                  <a:srgbClr val="22373A"/>
+                </a:solidFill>
+                <a:latin typeface="Calibri"/>
+                <a:cs typeface="Calibri"/>
+              </a:rPr>
+              <a:t> </a:t>
+            </a:r>
+            <a:r>
+              <a:rPr dirty="0" sz="1100" spc="-10">
+                <a:solidFill>
+                  <a:srgbClr val="22373A"/>
+                </a:solidFill>
+                <a:latin typeface="Courier New"/>
+                <a:cs typeface="Courier New"/>
+              </a:rPr>
+              <a:t>window_end</a:t>
+            </a:r>
+            <a:endParaRPr sz="1100">
+              <a:latin typeface="Courier New"/>
+              <a:cs typeface="Courier New"/>
+            </a:endParaRPr>
+          </a:p>
+          <a:p>
+            <a:pPr marL="288925" indent="-113664">
+              <a:lnSpc>
+                <a:spcPct val="100000"/>
+              </a:lnSpc>
+              <a:spcBef>
+                <a:spcPts val="535"/>
+              </a:spcBef>
+              <a:buFont typeface="Calibri"/>
+              <a:buChar char="•"/>
+              <a:tabLst>
+                <a:tab pos="288925" algn="l"/>
+              </a:tabLst>
+            </a:pPr>
+            <a:r>
+              <a:rPr dirty="0" sz="1100" spc="-10">
+                <a:solidFill>
+                  <a:srgbClr val="22373A"/>
+                </a:solidFill>
+                <a:latin typeface="Courier New"/>
+                <a:cs typeface="Courier New"/>
+              </a:rPr>
+              <a:t>pu_location_id</a:t>
+            </a:r>
+            <a:r>
+              <a:rPr dirty="0" sz="1100" spc="-10">
+                <a:solidFill>
+                  <a:srgbClr val="22373A"/>
+                </a:solidFill>
+                <a:latin typeface="Calibri"/>
+                <a:cs typeface="Calibri"/>
+              </a:rPr>
+              <a:t>, </a:t>
+            </a:r>
+            <a:r>
+              <a:rPr dirty="0" sz="1100" spc="-10">
+                <a:solidFill>
+                  <a:srgbClr val="22373A"/>
+                </a:solidFill>
+                <a:latin typeface="Courier New"/>
+                <a:cs typeface="Courier New"/>
+              </a:rPr>
+              <a:t>trip_count</a:t>
             </a:r>
             <a:endParaRPr sz="1100">
               <a:latin typeface="Courier New"/>
@@ -16659,357 +16762,6 @@
                 <a:latin typeface="Courier New"/>
                 <a:cs typeface="Courier New"/>
               </a:rPr>
-              <a:t>passenger_count</a:t>
-            </a:r>
-            <a:r>
-              <a:rPr dirty="0" sz="1100" spc="-20">
-                <a:solidFill>
-                  <a:srgbClr val="22373A"/>
-                </a:solidFill>
-                <a:latin typeface="Calibri"/>
-                <a:cs typeface="Calibri"/>
-              </a:rPr>
-              <a:t>, </a:t>
-            </a:r>
-            <a:r>
-              <a:rPr dirty="0" sz="1100" spc="-10">
-                <a:solidFill>
-                  <a:srgbClr val="22373A"/>
-                </a:solidFill>
-                <a:latin typeface="Courier New"/>
-                <a:cs typeface="Courier New"/>
-              </a:rPr>
-              <a:t>trip_distance</a:t>
-            </a:r>
-            <a:endParaRPr sz="1100">
-              <a:latin typeface="Courier New"/>
-              <a:cs typeface="Courier New"/>
-            </a:endParaRPr>
-          </a:p>
-          <a:p>
-            <a:pPr marL="289560" marR="706755" indent="-114300">
-              <a:lnSpc>
-                <a:spcPct val="118000"/>
-              </a:lnSpc>
-              <a:spcBef>
-                <a:spcPts val="300"/>
-              </a:spcBef>
-              <a:buFont typeface="Calibri"/>
-              <a:buChar char="•"/>
-              <a:tabLst>
-                <a:tab pos="289560" algn="l"/>
-              </a:tabLst>
-            </a:pPr>
-            <a:r>
-              <a:rPr dirty="0" sz="1100" spc="-20">
-                <a:solidFill>
-                  <a:srgbClr val="22373A"/>
-                </a:solidFill>
-                <a:latin typeface="Courier New"/>
-                <a:cs typeface="Courier New"/>
-              </a:rPr>
-              <a:t>pu_location_id</a:t>
-            </a:r>
-            <a:r>
-              <a:rPr dirty="0" sz="1100" spc="-20">
-                <a:solidFill>
-                  <a:srgbClr val="22373A"/>
-                </a:solidFill>
-                <a:latin typeface="Calibri"/>
-                <a:cs typeface="Calibri"/>
-              </a:rPr>
-              <a:t>, </a:t>
-            </a:r>
-            <a:r>
-              <a:rPr dirty="0" sz="1100" spc="-10">
-                <a:solidFill>
-                  <a:srgbClr val="22373A"/>
-                </a:solidFill>
-                <a:latin typeface="Courier New"/>
-                <a:cs typeface="Courier New"/>
-              </a:rPr>
-              <a:t>do_location_id</a:t>
-            </a:r>
-            <a:endParaRPr sz="1100">
-              <a:latin typeface="Courier New"/>
-              <a:cs typeface="Courier New"/>
-            </a:endParaRPr>
-          </a:p>
-          <a:p>
-            <a:pPr marL="288925" indent="-113664">
-              <a:lnSpc>
-                <a:spcPct val="100000"/>
-              </a:lnSpc>
-              <a:spcBef>
-                <a:spcPts val="540"/>
-              </a:spcBef>
-              <a:buFont typeface="Calibri"/>
-              <a:buChar char="•"/>
-              <a:tabLst>
-                <a:tab pos="288925" algn="l"/>
-              </a:tabLst>
-            </a:pPr>
-            <a:r>
-              <a:rPr dirty="0" sz="1100" spc="-10">
-                <a:solidFill>
-                  <a:srgbClr val="22373A"/>
-                </a:solidFill>
-                <a:latin typeface="Courier New"/>
-                <a:cs typeface="Courier New"/>
-              </a:rPr>
-              <a:t>total_amount</a:t>
-            </a:r>
-            <a:r>
-              <a:rPr dirty="0" sz="1100" spc="-10">
-                <a:solidFill>
-                  <a:srgbClr val="22373A"/>
-                </a:solidFill>
-                <a:latin typeface="Calibri"/>
-                <a:cs typeface="Calibri"/>
-              </a:rPr>
-              <a:t>,</a:t>
-            </a:r>
-            <a:r>
-              <a:rPr dirty="0" sz="1100" spc="-5">
-                <a:solidFill>
-                  <a:srgbClr val="22373A"/>
-                </a:solidFill>
-                <a:latin typeface="Calibri"/>
-                <a:cs typeface="Calibri"/>
-              </a:rPr>
-              <a:t> </a:t>
-            </a:r>
-            <a:r>
-              <a:rPr dirty="0" sz="1100" spc="-10">
-                <a:solidFill>
-                  <a:srgbClr val="22373A"/>
-                </a:solidFill>
-                <a:latin typeface="Courier New"/>
-                <a:cs typeface="Courier New"/>
-              </a:rPr>
-              <a:t>emitted_at</a:t>
-            </a:r>
-            <a:endParaRPr sz="1100">
-              <a:latin typeface="Courier New"/>
-              <a:cs typeface="Courier New"/>
-            </a:endParaRPr>
-          </a:p>
-        </p:txBody>
-      </p:sp>
-      <p:sp>
-        <p:nvSpPr>
-          <p:cNvPr id="4" name="object 4"/>
-          <p:cNvSpPr txBox="1"/>
-          <p:nvPr/>
-        </p:nvSpPr>
-        <p:spPr>
-          <a:xfrm>
-            <a:off x="2987294" y="528177"/>
-            <a:ext cx="2367915" cy="1836420"/>
-          </a:xfrm>
-          <a:prstGeom prst="rect">
-            <a:avLst/>
-          </a:prstGeom>
-        </p:spPr>
-        <p:txBody>
-          <a:bodyPr wrap="square" lIns="0" tIns="80645" rIns="0" bIns="0" rtlCol="0" vert="horz">
-            <a:spAutoFit/>
-          </a:bodyPr>
-          <a:lstStyle/>
-          <a:p>
-            <a:pPr marL="12700">
-              <a:lnSpc>
-                <a:spcPct val="100000"/>
-              </a:lnSpc>
-              <a:spcBef>
-                <a:spcPts val="635"/>
-              </a:spcBef>
-            </a:pPr>
-            <a:r>
-              <a:rPr dirty="0" sz="1100" b="1">
-                <a:solidFill>
-                  <a:srgbClr val="22373A"/>
-                </a:solidFill>
-                <a:latin typeface="Calibri"/>
-                <a:cs typeface="Calibri"/>
-              </a:rPr>
-              <a:t>Windowed</a:t>
-            </a:r>
-            <a:r>
-              <a:rPr dirty="0" sz="1100" spc="120" b="1">
-                <a:solidFill>
-                  <a:srgbClr val="22373A"/>
-                </a:solidFill>
-                <a:latin typeface="Calibri"/>
-                <a:cs typeface="Calibri"/>
-              </a:rPr>
-              <a:t> </a:t>
-            </a:r>
-            <a:r>
-              <a:rPr dirty="0" sz="1100" spc="45" b="1">
-                <a:solidFill>
-                  <a:srgbClr val="22373A"/>
-                </a:solidFill>
-                <a:latin typeface="Calibri"/>
-                <a:cs typeface="Calibri"/>
-              </a:rPr>
-              <a:t>aggregate</a:t>
-            </a:r>
-            <a:r>
-              <a:rPr dirty="0" sz="1100" spc="120" b="1">
-                <a:solidFill>
-                  <a:srgbClr val="22373A"/>
-                </a:solidFill>
-                <a:latin typeface="Calibri"/>
-                <a:cs typeface="Calibri"/>
-              </a:rPr>
-              <a:t> </a:t>
-            </a:r>
-            <a:r>
-              <a:rPr dirty="0" sz="1100" spc="-10" b="1">
-                <a:solidFill>
-                  <a:srgbClr val="22373A"/>
-                </a:solidFill>
-                <a:latin typeface="Calibri"/>
-                <a:cs typeface="Calibri"/>
-              </a:rPr>
-              <a:t>fields</a:t>
-            </a:r>
-            <a:endParaRPr sz="1100">
-              <a:latin typeface="Calibri"/>
-              <a:cs typeface="Calibri"/>
-            </a:endParaRPr>
-          </a:p>
-          <a:p>
-            <a:pPr marL="288925" indent="-113664">
-              <a:lnSpc>
-                <a:spcPct val="100000"/>
-              </a:lnSpc>
-              <a:spcBef>
-                <a:spcPts val="540"/>
-              </a:spcBef>
-              <a:buFont typeface="Calibri"/>
-              <a:buChar char="•"/>
-              <a:tabLst>
-                <a:tab pos="288925" algn="l"/>
-              </a:tabLst>
-            </a:pPr>
-            <a:r>
-              <a:rPr dirty="0" sz="1100" spc="-10">
-                <a:solidFill>
-                  <a:srgbClr val="22373A"/>
-                </a:solidFill>
-                <a:latin typeface="Courier New"/>
-                <a:cs typeface="Courier New"/>
-              </a:rPr>
-              <a:t>window_start</a:t>
-            </a:r>
-            <a:r>
-              <a:rPr dirty="0" sz="1100" spc="-10">
-                <a:solidFill>
-                  <a:srgbClr val="22373A"/>
-                </a:solidFill>
-                <a:latin typeface="Calibri"/>
-                <a:cs typeface="Calibri"/>
-              </a:rPr>
-              <a:t>,</a:t>
-            </a:r>
-            <a:r>
-              <a:rPr dirty="0" sz="1100" spc="-5">
-                <a:solidFill>
-                  <a:srgbClr val="22373A"/>
-                </a:solidFill>
-                <a:latin typeface="Calibri"/>
-                <a:cs typeface="Calibri"/>
-              </a:rPr>
-              <a:t> </a:t>
-            </a:r>
-            <a:r>
-              <a:rPr dirty="0" sz="1100" spc="-10">
-                <a:solidFill>
-                  <a:srgbClr val="22373A"/>
-                </a:solidFill>
-                <a:latin typeface="Courier New"/>
-                <a:cs typeface="Courier New"/>
-              </a:rPr>
-              <a:t>window_end</a:t>
-            </a:r>
-            <a:endParaRPr sz="1100">
-              <a:latin typeface="Courier New"/>
-              <a:cs typeface="Courier New"/>
-            </a:endParaRPr>
-          </a:p>
-          <a:p>
-            <a:pPr marL="288925" indent="-113664">
-              <a:lnSpc>
-                <a:spcPct val="100000"/>
-              </a:lnSpc>
-              <a:spcBef>
-                <a:spcPts val="535"/>
-              </a:spcBef>
-              <a:buFont typeface="Calibri"/>
-              <a:buChar char="•"/>
-              <a:tabLst>
-                <a:tab pos="288925" algn="l"/>
-              </a:tabLst>
-            </a:pPr>
-            <a:r>
-              <a:rPr dirty="0" sz="1100" spc="-10">
-                <a:solidFill>
-                  <a:srgbClr val="22373A"/>
-                </a:solidFill>
-                <a:latin typeface="Courier New"/>
-                <a:cs typeface="Courier New"/>
-              </a:rPr>
-              <a:t>pu_location_id</a:t>
-            </a:r>
-            <a:r>
-              <a:rPr dirty="0" sz="1100" spc="-10">
-                <a:solidFill>
-                  <a:srgbClr val="22373A"/>
-                </a:solidFill>
-                <a:latin typeface="Calibri"/>
-                <a:cs typeface="Calibri"/>
-              </a:rPr>
-              <a:t>, </a:t>
-            </a:r>
-            <a:r>
-              <a:rPr dirty="0" sz="1100" spc="-10">
-                <a:solidFill>
-                  <a:srgbClr val="22373A"/>
-                </a:solidFill>
-                <a:latin typeface="Courier New"/>
-                <a:cs typeface="Courier New"/>
-              </a:rPr>
-              <a:t>trip_count</a:t>
-            </a:r>
-            <a:endParaRPr sz="1100">
-              <a:latin typeface="Courier New"/>
-              <a:cs typeface="Courier New"/>
-            </a:endParaRPr>
-          </a:p>
-          <a:p>
-            <a:pPr marL="289560" marR="623570" indent="-114300">
-              <a:lnSpc>
-                <a:spcPct val="118000"/>
-              </a:lnSpc>
-              <a:spcBef>
-                <a:spcPts val="300"/>
-              </a:spcBef>
-              <a:buFont typeface="Calibri"/>
-              <a:buChar char="•"/>
-              <a:tabLst>
-                <a:tab pos="289560" algn="l"/>
-              </a:tabLst>
-            </a:pPr>
-            <a:r>
-              <a:rPr dirty="0" sz="1100" spc="-20">
-                <a:solidFill>
-                  <a:srgbClr val="22373A"/>
-                </a:solidFill>
-                <a:latin typeface="Courier New"/>
-                <a:cs typeface="Courier New"/>
-              </a:rPr>
               <a:t>avg_trip_distance</a:t>
             </a:r>
             <a:r>
@@ -17086,35 +16838,6 @@
               <a:cs typeface="Courier New"/>
             </a:endParaRPr>
           </a:p>
-          <a:p>
-            <a:pPr marL="288925" indent="-113664">
-              <a:lnSpc>
-                <a:spcPct val="100000"/>
-              </a:lnSpc>
-              <a:spcBef>
-                <a:spcPts val="535"/>
-              </a:spcBef>
-              <a:buFont typeface="Calibri"/>
-              <a:buChar char="•"/>
-              <a:tabLst>
-                <a:tab pos="288925" algn="l"/>
-              </a:tabLst>
-            </a:pPr>
-            <a:r>
-              <a:rPr dirty="0" sz="1100" spc="-10">
-                <a:solidFill>
-                  <a:srgbClr val="22373A"/>
-                </a:solidFill>
-                <a:latin typeface="Courier New"/>
-                <a:cs typeface="Courier New"/>
-              </a:rPr>
-              <a:t>anomaly_count</a:t>
-            </a:r>
-            <a:endParaRPr sz="1100">
-              <a:latin typeface="Courier New"/>
-              <a:cs typeface="Courier New"/>
-            </a:endParaRPr>
-          </a:p>
         </p:txBody>
       </p:sp>
       <p:sp>
@@ -17125,69 +16848,39 @@
         </p:nvSpPr>
         <p:spPr>
           <a:xfrm>
-            <a:off x="347294" y="2452634"/>
-            <a:ext cx="4996815" cy="421640"/>
+            <a:off x="347294" y="2558540"/>
+            <a:ext cx="4925060" cy="191770"/>
           </a:xfrm>
           <a:prstGeom prst="rect">
             <a:avLst/>
           </a:prstGeom>
         </p:spPr>
         <p:txBody>
-          <a:bodyPr wrap="square" lIns="0" tIns="12700" rIns="0" bIns="0" rtlCol="0" vert="horz">
+          <a:bodyPr wrap="square" lIns="0" tIns="11430" rIns="0" bIns="0" rtlCol="0" vert="horz">
             <a:spAutoFit/>
           </a:bodyPr>
           <a:lstStyle/>
           <a:p>
-            <a:pPr marL="12700" marR="5080">
+            <a:pPr marL="12700">
               <a:lnSpc>
-                <a:spcPct val="118000"/>
+                <a:spcPct val="100000"/>
               </a:lnSpc>
               <a:spcBef>
-                <a:spcPts val="100"/>
+                <a:spcPts val="90"/>
               </a:spcBef>
             </a:pPr>
             <a:r>
-              <a:rPr dirty="0" sz="1100">
-                <a:solidFill>
-                  <a:srgbClr val="22373A"/>
-                </a:solidFill>
-                <a:latin typeface="Calibri"/>
-                <a:cs typeface="Calibri"/>
-              </a:rPr>
-              <a:t>Pre-</a:t>
-            </a:r>
-            <a:r>
-              <a:rPr dirty="0" sz="1100" spc="-25">
-                <a:solidFill>
-                  <a:srgbClr val="22373A"/>
-                </a:solidFill>
-                <a:latin typeface="Calibri"/>
-                <a:cs typeface="Calibri"/>
-              </a:rPr>
-              <a:t>2017</a:t>
-            </a:r>
-            <a:r>
-              <a:rPr dirty="0" sz="1100" spc="190">
-                <a:solidFill>
-                  <a:srgbClr val="22373A"/>
-                </a:solidFill>
-                <a:latin typeface="Calibri"/>
-                <a:cs typeface="Calibri"/>
-              </a:rPr>
-              <a:t> </a:t>
-            </a:r>
-            <a:r>
-              <a:rPr dirty="0" sz="1100">
-                <a:solidFill>
-                  <a:srgbClr val="22373A"/>
-                </a:solidFill>
-                <a:latin typeface="Calibri"/>
-                <a:cs typeface="Calibri"/>
-              </a:rPr>
-              <a:t>files</a:t>
-            </a:r>
-            <a:r>
-              <a:rPr dirty="0" sz="1100" spc="195">
+              <a:rPr dirty="0" sz="1100" spc="20">
+                <a:solidFill>
+                  <a:srgbClr val="22373A"/>
+                </a:solidFill>
+                <a:latin typeface="Calibri"/>
+                <a:cs typeface="Calibri"/>
+              </a:rPr>
+              <a:t>Coordinates</a:t>
+            </a:r>
+            <a:r>
+              <a:rPr dirty="0" sz="1100" spc="140">
                 <a:solidFill>
                   <a:srgbClr val="22373A"/>
                 </a:solidFill>
@@ -17204,80 +16897,20 @@
                 <a:latin typeface="Calibri"/>
                 <a:cs typeface="Calibri"/>
               </a:rPr>
-              <a:t>(lat/lon</a:t>
-            </a:r>
-            <a:r>
-              <a:rPr dirty="0" sz="1100" spc="195">
-                <a:solidFill>
-                  <a:srgbClr val="22373A"/>
-                </a:solidFill>
-                <a:latin typeface="Calibri"/>
-                <a:cs typeface="Calibri"/>
-              </a:rPr>
-              <a:t> </a:t>
-            </a:r>
-            <a:r>
-              <a:rPr dirty="0" sz="1100">
-                <a:solidFill>
-                  <a:srgbClr val="22373A"/>
-                </a:solidFill>
-                <a:latin typeface="Calibri"/>
-                <a:cs typeface="Calibri"/>
-              </a:rPr>
-              <a:t>format)</a:t>
-            </a:r>
-            <a:r>
-              <a:rPr dirty="0" sz="1100" spc="190">
-                <a:solidFill>
-                  <a:srgbClr val="22373A"/>
-                </a:solidFill>
-                <a:latin typeface="Calibri"/>
-                <a:cs typeface="Calibri"/>
-              </a:rPr>
-              <a:t> </a:t>
-            </a:r>
-            <a:r>
-              <a:rPr dirty="0" sz="1100">
-                <a:solidFill>
-                  <a:srgbClr val="22373A"/>
-                </a:solidFill>
-                <a:latin typeface="Calibri"/>
-                <a:cs typeface="Calibri"/>
-              </a:rPr>
-              <a:t>are</a:t>
-            </a:r>
-            <a:r>
-              <a:rPr dirty="0" sz="1100" spc="195">
-                <a:solidFill>
-                  <a:srgbClr val="22373A"/>
-                </a:solidFill>
-                <a:latin typeface="Calibri"/>
-                <a:cs typeface="Calibri"/>
-              </a:rPr>
-              <a:t> </a:t>
-            </a:r>
-            <a:r>
-              <a:rPr dirty="0" sz="1100" spc="55">
-                <a:solidFill>
-                  <a:srgbClr val="22373A"/>
-                </a:solidFill>
-                <a:latin typeface="Calibri"/>
-                <a:cs typeface="Calibri"/>
-              </a:rPr>
               <a:t>snapped</a:t>
             </a:r>
             <a:r>
-              <a:rPr dirty="0" sz="1100" spc="195">
-                <a:solidFill>
-                  <a:srgbClr val="22373A"/>
-                </a:solidFill>
-                <a:latin typeface="Calibri"/>
-                <a:cs typeface="Calibri"/>
-              </a:rPr>
-              <a:t> </a:t>
-            </a:r>
-            <a:r>
-              <a:rPr dirty="0" sz="1100">
+              <a:rPr dirty="0" sz="1100" spc="140">
+                <a:solidFill>
+                  <a:srgbClr val="22373A"/>
+                </a:solidFill>
+                <a:latin typeface="Calibri"/>
+                <a:cs typeface="Calibri"/>
+              </a:rPr>
+              <a:t> </a:t>
+            </a:r>
+            <a:r>
+              <a:rPr dirty="0" sz="1100" spc="20">
                 <a:solidFill>
                   <a:srgbClr val="22373A"/>
                 </a:solidFill>
@@ -17287,17 +16920,17 @@
               <a:t>to</a:t>
             </a:r>
             <a:r>
-              <a:rPr dirty="0" sz="1100" spc="190">
-                <a:solidFill>
-                  <a:srgbClr val="22373A"/>
-                </a:solidFill>
-                <a:latin typeface="Calibri"/>
-                <a:cs typeface="Calibri"/>
-              </a:rPr>
-              <a:t> </a:t>
-            </a:r>
-            <a:r>
-              <a:rPr dirty="0" sz="1100">
+              <a:rPr dirty="0" sz="1100" spc="140">
+                <a:solidFill>
+                  <a:srgbClr val="22373A"/>
+                </a:solidFill>
+                <a:latin typeface="Calibri"/>
+                <a:cs typeface="Calibri"/>
+              </a:rPr>
+              <a:t> </a:t>
+            </a:r>
+            <a:r>
+              <a:rPr dirty="0" sz="1100" spc="20">
                 <a:solidFill>
                   <a:srgbClr val="22373A"/>
                 </a:solidFill>
@@ -17307,17 +16940,17 @@
               <a:t>nearest</a:t>
             </a:r>
             <a:r>
-              <a:rPr dirty="0" sz="1100" spc="195">
-                <a:solidFill>
-                  <a:srgbClr val="22373A"/>
-                </a:solidFill>
-                <a:latin typeface="Calibri"/>
-                <a:cs typeface="Calibri"/>
-              </a:rPr>
-              <a:t> </a:t>
-            </a:r>
-            <a:r>
-              <a:rPr dirty="0" sz="1100">
+              <a:rPr dirty="0" sz="1100" spc="140">
+                <a:solidFill>
+                  <a:srgbClr val="22373A"/>
+                </a:solidFill>
+                <a:latin typeface="Calibri"/>
+                <a:cs typeface="Calibri"/>
+              </a:rPr>
+              <a:t> </a:t>
+            </a:r>
+            <a:r>
+              <a:rPr dirty="0" sz="1100" spc="20">
                 <a:solidFill>
                   <a:srgbClr val="22373A"/>
                 </a:solidFill>
@@ -17327,17 +16960,17 @@
               <a:t>zone</a:t>
             </a:r>
             <a:r>
-              <a:rPr dirty="0" sz="1100" spc="195">
-                <a:solidFill>
-                  <a:srgbClr val="22373A"/>
-                </a:solidFill>
-                <a:latin typeface="Calibri"/>
-                <a:cs typeface="Calibri"/>
-              </a:rPr>
-              <a:t> </a:t>
-            </a:r>
-            <a:r>
-              <a:rPr dirty="0" sz="1100">
+              <a:rPr dirty="0" sz="1100" spc="145">
+                <a:solidFill>
+                  <a:srgbClr val="22373A"/>
+                </a:solidFill>
+                <a:latin typeface="Calibri"/>
+                <a:cs typeface="Calibri"/>
+              </a:rPr>
+              <a:t> </a:t>
+            </a:r>
+            <a:r>
+              <a:rPr dirty="0" sz="1100" spc="20">
                 <a:solidFill>
                   <a:srgbClr val="22373A"/>
                 </a:solidFill>
@@ -17347,17 +16980,17 @@
               <a:t>centroid</a:t>
             </a:r>
             <a:r>
-              <a:rPr dirty="0" sz="1100" spc="195">
-                <a:solidFill>
-                  <a:srgbClr val="22373A"/>
-                </a:solidFill>
-                <a:latin typeface="Calibri"/>
-                <a:cs typeface="Calibri"/>
-              </a:rPr>
-              <a:t> </a:t>
-            </a:r>
-            <a:r>
-              <a:rPr dirty="0" sz="1100">
+              <a:rPr dirty="0" sz="1100" spc="140">
+                <a:solidFill>
+                  <a:srgbClr val="22373A"/>
+                </a:solidFill>
+                <a:latin typeface="Calibri"/>
+                <a:cs typeface="Calibri"/>
+              </a:rPr>
+              <a:t> </a:t>
+            </a:r>
+            <a:r>
+              <a:rPr dirty="0" sz="1100" spc="20">
                 <a:solidFill>
                   <a:srgbClr val="22373A"/>
                 </a:solidFill>
@@ -17367,24 +17000,34 @@
               <a:t>via</a:t>
             </a:r>
             <a:r>
-              <a:rPr dirty="0" sz="1100" spc="190">
-                <a:solidFill>
-                  <a:srgbClr val="22373A"/>
-                </a:solidFill>
-                <a:latin typeface="Calibri"/>
-                <a:cs typeface="Calibri"/>
-              </a:rPr>
-              <a:t> </a:t>
-            </a:r>
-            <a:r>
-              <a:rPr dirty="0" sz="1100" spc="-10">
-                <a:solidFill>
-                  <a:srgbClr val="22373A"/>
-                </a:solidFill>
-                <a:latin typeface="Calibri"/>
-                <a:cs typeface="Calibri"/>
-              </a:rPr>
-              <a:t>BallTree </a:t>
+              <a:rPr dirty="0" sz="1100" spc="140">
+                <a:solidFill>
+                  <a:srgbClr val="22373A"/>
+                </a:solidFill>
+                <a:latin typeface="Calibri"/>
+                <a:cs typeface="Calibri"/>
+              </a:rPr>
+              <a:t> </a:t>
+            </a:r>
+            <a:r>
+              <a:rPr dirty="0" sz="1100" spc="20">
+                <a:solidFill>
+                  <a:srgbClr val="22373A"/>
+                </a:solidFill>
+                <a:latin typeface="Calibri"/>
+                <a:cs typeface="Calibri"/>
+              </a:rPr>
+              <a:t>BallTree</a:t>
+            </a:r>
+            <a:r>
+              <a:rPr dirty="0" sz="1100" spc="140">
+                <a:solidFill>
+                  <a:srgbClr val="22373A"/>
+                </a:solidFill>
+                <a:latin typeface="Calibri"/>
+                <a:cs typeface="Calibri"/>
+              </a:rPr>
+              <a:t> </a:t>
             </a:r>
             <a:r>
               <a:rPr dirty="0" sz="1100" spc="50">
@@ -17417,17 +17060,17 @@
               <a:t>100</a:t>
             </a:r>
             <a:r>
-              <a:rPr dirty="0" sz="1100" spc="65">
-                <a:solidFill>
-                  <a:srgbClr val="22373A"/>
-                </a:solidFill>
-                <a:latin typeface="Calibri"/>
-                <a:cs typeface="Calibri"/>
-              </a:rPr>
-              <a:t> </a:t>
-            </a:r>
-            <a:r>
-              <a:rPr dirty="0" sz="1100">
+              <a:rPr dirty="0" sz="1100" spc="145">
+                <a:solidFill>
+                  <a:srgbClr val="22373A"/>
+                </a:solidFill>
+                <a:latin typeface="Calibri"/>
+                <a:cs typeface="Calibri"/>
+              </a:rPr>
+              <a:t> </a:t>
+            </a:r>
+            <a:r>
+              <a:rPr dirty="0" sz="1100" spc="20">
                 <a:solidFill>
                   <a:srgbClr val="22373A"/>
                 </a:solidFill>
@@ -17437,7 +17080,7 @@
               <a:t>m</a:t>
             </a:r>
             <a:r>
-              <a:rPr dirty="0" sz="1100" spc="65">
+              <a:rPr dirty="0" sz="1100" spc="140">
                 <a:solidFill>
                   <a:srgbClr val="22373A"/>
                 </a:solidFill>

--- a/reports/streamcab_presentation.pptx
+++ b/reports/streamcab_presentation.pptx
@@ -14990,7 +14990,7 @@
               <a:t>Rows:</a:t>
             </a:r>
             <a:r>
-              <a:rPr dirty="0" sz="1100" spc="220">
+              <a:rPr dirty="0" sz="1100" spc="225">
                 <a:solidFill>
                   <a:srgbClr val="22373A"/>
                 </a:solidFill>
@@ -15010,7 +15010,7 @@
               <a:t>1642819405</a:t>
             </a:r>
             <a:r>
-              <a:rPr dirty="0" sz="1100" spc="459" b="1">
+              <a:rPr dirty="0" sz="1100" spc="470" b="1">
                 <a:solidFill>
                   <a:srgbClr val="22373A"/>
                 </a:solidFill>
@@ -15040,17 +15040,17 @@
               <a:t> </a:t>
             </a:r>
             <a:r>
-              <a:rPr dirty="0" sz="1100" spc="10">
-                <a:solidFill>
-                  <a:srgbClr val="22373A"/>
-                </a:solidFill>
-                <a:latin typeface="Calibri"/>
-                <a:cs typeface="Calibri"/>
-              </a:rPr>
-              <a:t>16</a:t>
-            </a:r>
-            <a:r>
-              <a:rPr dirty="0" sz="1100" spc="105">
+              <a:rPr dirty="0" sz="1100">
+                <a:solidFill>
+                  <a:srgbClr val="22373A"/>
+                </a:solidFill>
+                <a:latin typeface="Calibri"/>
+                <a:cs typeface="Calibri"/>
+              </a:rPr>
+              <a:t>16̇</a:t>
+            </a:r>
+            <a:r>
+              <a:rPr dirty="0" sz="1100" spc="110">
                 <a:solidFill>
                   <a:srgbClr val="22373A"/>
                 </a:solidFill>

--- a/reports/streamcab_presentation.pptx
+++ b/reports/streamcab_presentation.pptx
@@ -1648,7 +1648,7 @@
       </p:grpSpPr>
       <p:sp>
         <p:nvSpPr>
-          <p:cNvPr id="2" name="object 2"/>
+          <p:cNvPr id="2" name="object 2" descr=""/>
           <p:cNvSpPr/>
           <p:nvPr/>
         </p:nvSpPr>
@@ -1696,7 +1696,7 @@
       </p:sp>
       <p:sp>
         <p:nvSpPr>
-          <p:cNvPr id="3" name="object 3" descr="$PPTXTitle"/>
+          <p:cNvPr id="3" name="object 3"/>
           <p:cNvSpPr txBox="1">
             <a:spLocks noGrp="1"/>
           </p:cNvSpPr>
@@ -1739,7 +1739,7 @@
       </p:sp>
       <p:sp>
         <p:nvSpPr>
-          <p:cNvPr id="4" name="object 4"/>
+          <p:cNvPr id="4" name="object 4" descr=""/>
           <p:cNvSpPr txBox="1"/>
           <p:nvPr/>
         </p:nvSpPr>
@@ -1989,7 +1989,7 @@
       </p:sp>
       <p:sp>
         <p:nvSpPr>
-          <p:cNvPr id="5" name="object 5"/>
+          <p:cNvPr id="5" name="object 5" descr=""/>
           <p:cNvSpPr/>
           <p:nvPr/>
         </p:nvSpPr>
@@ -2013,10 +2013,10 @@
                   <a:pt x="0" y="0"/>
                 </a:lnTo>
                 <a:lnTo>
-                  <a:pt x="5040064" y="0"/>
+                  <a:pt x="5040071" y="0"/>
                 </a:lnTo>
                 <a:lnTo>
-                  <a:pt x="5040064" y="5060"/>
+                  <a:pt x="5040071" y="5060"/>
                 </a:lnTo>
                 <a:lnTo>
                   <a:pt x="0" y="5060"/>
@@ -2037,7 +2037,7 @@
       </p:sp>
       <p:sp>
         <p:nvSpPr>
-          <p:cNvPr id="6" name="object 6"/>
+          <p:cNvPr id="6" name="object 6" descr=""/>
           <p:cNvSpPr txBox="1"/>
           <p:nvPr/>
         </p:nvSpPr>
@@ -2202,7 +2202,7 @@
                 <a:latin typeface="Calibri"/>
                 <a:cs typeface="Calibri"/>
               </a:rPr>
-              <a:t>22,</a:t>
+              <a:t>24,</a:t>
             </a:r>
             <a:r>
               <a:rPr dirty="0" sz="1000" spc="105">
@@ -2325,7 +2325,7 @@
       </p:grpSpPr>
       <p:sp>
         <p:nvSpPr>
-          <p:cNvPr id="2" name="object 2" descr="$PPTXTitle"/>
+          <p:cNvPr id="2" name="object 2"/>
           <p:cNvSpPr txBox="1">
             <a:spLocks noGrp="1"/>
           </p:cNvSpPr>
@@ -2375,13 +2375,13 @@
       </p:sp>
       <p:sp>
         <p:nvSpPr>
-          <p:cNvPr id="3" name="object 3"/>
+          <p:cNvPr id="3" name="object 3" descr=""/>
           <p:cNvSpPr txBox="1"/>
           <p:nvPr/>
         </p:nvSpPr>
         <p:spPr>
           <a:xfrm>
-            <a:off x="347294" y="650061"/>
+            <a:off x="347294" y="650060"/>
             <a:ext cx="3314700" cy="191770"/>
           </a:xfrm>
           <a:prstGeom prst="rect">
@@ -2581,7 +2581,7 @@
       </p:sp>
       <p:sp>
         <p:nvSpPr>
-          <p:cNvPr id="4" name="object 4"/>
+          <p:cNvPr id="4" name="object 4" descr=""/>
           <p:cNvSpPr/>
           <p:nvPr/>
         </p:nvSpPr>
@@ -2621,13 +2621,13 @@
       </p:sp>
       <p:sp>
         <p:nvSpPr>
-          <p:cNvPr id="5" name="object 5"/>
+          <p:cNvPr id="5" name="object 5" descr=""/>
           <p:cNvSpPr txBox="1"/>
           <p:nvPr/>
         </p:nvSpPr>
         <p:spPr>
           <a:xfrm>
-            <a:off x="1292948" y="1127835"/>
+            <a:off x="1292948" y="1127834"/>
             <a:ext cx="324485" cy="191770"/>
           </a:xfrm>
           <a:prstGeom prst="rect">
@@ -2667,13 +2667,13 @@
       </p:sp>
       <p:sp>
         <p:nvSpPr>
-          <p:cNvPr id="6" name="object 6"/>
+          <p:cNvPr id="6" name="object 6" descr=""/>
           <p:cNvSpPr txBox="1"/>
           <p:nvPr/>
         </p:nvSpPr>
         <p:spPr>
           <a:xfrm>
-            <a:off x="2665103" y="1127835"/>
+            <a:off x="2665104" y="1127834"/>
             <a:ext cx="984250" cy="191770"/>
           </a:xfrm>
           <a:prstGeom prst="rect">
@@ -2733,7 +2733,7 @@
       </p:sp>
       <p:sp>
         <p:nvSpPr>
-          <p:cNvPr id="7" name="object 7"/>
+          <p:cNvPr id="7" name="object 7" descr=""/>
           <p:cNvSpPr/>
           <p:nvPr/>
         </p:nvSpPr>
@@ -2773,7 +2773,7 @@
       </p:sp>
       <p:sp>
         <p:nvSpPr>
-          <p:cNvPr id="8" name="object 8"/>
+          <p:cNvPr id="8" name="object 8" descr=""/>
           <p:cNvSpPr txBox="1"/>
           <p:nvPr/>
         </p:nvSpPr>
@@ -2980,13 +2980,13 @@
       </p:sp>
       <p:sp>
         <p:nvSpPr>
-          <p:cNvPr id="9" name="object 9"/>
+          <p:cNvPr id="9" name="object 9" descr=""/>
           <p:cNvSpPr txBox="1"/>
           <p:nvPr/>
         </p:nvSpPr>
         <p:spPr>
           <a:xfrm>
-            <a:off x="2665103" y="1377693"/>
+            <a:off x="2665104" y="1377693"/>
             <a:ext cx="1802130" cy="1015365"/>
           </a:xfrm>
           <a:prstGeom prst="rect">
@@ -3140,24 +3140,14 @@
               </a:spcBef>
             </a:pPr>
             <a:r>
-              <a:rPr dirty="0" sz="1100">
-                <a:solidFill>
-                  <a:srgbClr val="22373A"/>
-                </a:solidFill>
-                <a:latin typeface="Calibri"/>
-                <a:cs typeface="Calibri"/>
-              </a:rPr>
-              <a:t>$0–</a:t>
-            </a:r>
-            <a:r>
-              <a:rPr dirty="0" sz="1100" spc="-20">
-                <a:solidFill>
-                  <a:srgbClr val="22373A"/>
-                </a:solidFill>
-                <a:latin typeface="Calibri"/>
-                <a:cs typeface="Calibri"/>
-              </a:rPr>
-              <a:t>$500</a:t>
+              <a:rPr dirty="0" sz="1100" spc="-10">
+                <a:solidFill>
+                  <a:srgbClr val="22373A"/>
+                </a:solidFill>
+                <a:latin typeface="Calibri"/>
+                <a:cs typeface="Calibri"/>
+              </a:rPr>
+              <a:t>$0–$500</a:t>
             </a:r>
             <a:endParaRPr sz="1100">
               <a:latin typeface="Calibri"/>
@@ -3272,7 +3262,7 @@
       </p:sp>
       <p:sp>
         <p:nvSpPr>
-          <p:cNvPr id="10" name="object 10"/>
+          <p:cNvPr id="10" name="object 10" descr=""/>
           <p:cNvSpPr/>
           <p:nvPr/>
         </p:nvSpPr>
@@ -3312,7 +3302,7 @@
       </p:sp>
       <p:sp>
         <p:nvSpPr>
-          <p:cNvPr id="11" name="object 11"/>
+          <p:cNvPr id="11" name="object 11" descr=""/>
           <p:cNvSpPr txBox="1"/>
           <p:nvPr/>
         </p:nvSpPr>
@@ -3518,7 +3508,7 @@
       </p:sp>
       <p:sp>
         <p:nvSpPr>
-          <p:cNvPr id="12" name="object 12"/>
+          <p:cNvPr id="12" name="object 12" descr=""/>
           <p:cNvSpPr txBox="1">
             <a:spLocks noGrp="1"/>
           </p:cNvSpPr>
@@ -3596,7 +3586,7 @@
       </p:grpSpPr>
       <p:sp>
         <p:nvSpPr>
-          <p:cNvPr id="2" name="object 2"/>
+          <p:cNvPr id="2" name="object 2" descr=""/>
           <p:cNvSpPr txBox="1"/>
           <p:nvPr/>
         </p:nvSpPr>
@@ -3643,7 +3633,7 @@
       </p:sp>
       <p:grpSp>
         <p:nvGrpSpPr>
-          <p:cNvPr id="3" name="object 3"/>
+          <p:cNvPr id="3" name="object 3" descr=""/>
           <p:cNvGrpSpPr/>
           <p:nvPr/>
         </p:nvGrpSpPr>
@@ -3657,7 +3647,7 @@
         </p:grpSpPr>
         <p:sp>
           <p:nvSpPr>
-            <p:cNvPr id="4" name="object 4"/>
+            <p:cNvPr id="4" name="object 4" descr=""/>
             <p:cNvSpPr/>
             <p:nvPr/>
           </p:nvSpPr>
@@ -3705,7 +3695,7 @@
         </p:sp>
         <p:sp>
           <p:nvSpPr>
-            <p:cNvPr id="5" name="object 5"/>
+            <p:cNvPr id="5" name="object 5" descr=""/>
             <p:cNvSpPr/>
             <p:nvPr/>
           </p:nvSpPr>
@@ -3729,10 +3719,10 @@
                     <a:pt x="0" y="0"/>
                   </a:lnTo>
                   <a:lnTo>
-                    <a:pt x="1422395" y="0"/>
+                    <a:pt x="1422400" y="0"/>
                   </a:lnTo>
                   <a:lnTo>
-                    <a:pt x="1422395" y="5060"/>
+                    <a:pt x="1422400" y="5060"/>
                   </a:lnTo>
                   <a:lnTo>
                     <a:pt x="0" y="5060"/>
@@ -3782,7 +3772,7 @@
       </p:grpSpPr>
       <p:sp>
         <p:nvSpPr>
-          <p:cNvPr id="2" name="object 2" descr="$PPTXTitle"/>
+          <p:cNvPr id="2" name="object 2"/>
           <p:cNvSpPr txBox="1">
             <a:spLocks noGrp="1"/>
           </p:cNvSpPr>
@@ -3836,7 +3826,7 @@
       </p:sp>
       <p:sp>
         <p:nvSpPr>
-          <p:cNvPr id="3" name="object 3"/>
+          <p:cNvPr id="3" name="object 3" descr=""/>
           <p:cNvSpPr txBox="1"/>
           <p:nvPr/>
         </p:nvSpPr>
@@ -5179,7 +5169,7 @@
       </p:grpSpPr>
       <p:sp>
         <p:nvSpPr>
-          <p:cNvPr id="2" name="object 2" descr="$PPTXTitle"/>
+          <p:cNvPr id="2" name="object 2"/>
           <p:cNvSpPr txBox="1">
             <a:spLocks noGrp="1"/>
           </p:cNvSpPr>
@@ -5229,7 +5219,7 @@
       </p:sp>
       <p:sp>
         <p:nvSpPr>
-          <p:cNvPr id="3" name="object 3"/>
+          <p:cNvPr id="3" name="object 3" descr=""/>
           <p:cNvSpPr txBox="1"/>
           <p:nvPr/>
         </p:nvSpPr>
@@ -5421,7 +5411,7 @@
       </p:sp>
       <p:sp>
         <p:nvSpPr>
-          <p:cNvPr id="4" name="object 4"/>
+          <p:cNvPr id="4" name="object 4" descr=""/>
           <p:cNvSpPr txBox="1"/>
           <p:nvPr/>
         </p:nvSpPr>
@@ -5646,7 +5636,7 @@
       </p:sp>
       <p:sp>
         <p:nvSpPr>
-          <p:cNvPr id="5" name="object 5"/>
+          <p:cNvPr id="5" name="object 5" descr=""/>
           <p:cNvSpPr txBox="1"/>
           <p:nvPr/>
         </p:nvSpPr>
@@ -5919,7 +5909,7 @@
       </p:grpSpPr>
       <p:sp>
         <p:nvSpPr>
-          <p:cNvPr id="2" name="object 2" descr="$PPTXTitle"/>
+          <p:cNvPr id="2" name="object 2"/>
           <p:cNvSpPr txBox="1">
             <a:spLocks noGrp="1"/>
           </p:cNvSpPr>
@@ -5969,7 +5959,7 @@
       </p:sp>
       <p:sp>
         <p:nvSpPr>
-          <p:cNvPr id="3" name="object 3"/>
+          <p:cNvPr id="3" name="object 3" descr=""/>
           <p:cNvSpPr txBox="1"/>
           <p:nvPr/>
         </p:nvSpPr>
@@ -6265,7 +6255,7 @@
       </p:sp>
       <p:sp>
         <p:nvSpPr>
-          <p:cNvPr id="4" name="object 4"/>
+          <p:cNvPr id="4" name="object 4" descr=""/>
           <p:cNvSpPr txBox="1"/>
           <p:nvPr/>
         </p:nvSpPr>
@@ -6600,7 +6590,7 @@
       </p:grpSpPr>
       <p:sp>
         <p:nvSpPr>
-          <p:cNvPr id="2" name="object 2"/>
+          <p:cNvPr id="2" name="object 2" descr=""/>
           <p:cNvSpPr txBox="1"/>
           <p:nvPr/>
         </p:nvSpPr>
@@ -6647,7 +6637,7 @@
       </p:sp>
       <p:grpSp>
         <p:nvGrpSpPr>
-          <p:cNvPr id="3" name="object 3"/>
+          <p:cNvPr id="3" name="object 3" descr=""/>
           <p:cNvGrpSpPr/>
           <p:nvPr/>
         </p:nvGrpSpPr>
@@ -6661,7 +6651,7 @@
         </p:grpSpPr>
         <p:sp>
           <p:nvSpPr>
-            <p:cNvPr id="4" name="object 4"/>
+            <p:cNvPr id="4" name="object 4" descr=""/>
             <p:cNvSpPr/>
             <p:nvPr/>
           </p:nvSpPr>
@@ -6709,7 +6699,7 @@
         </p:sp>
         <p:sp>
           <p:nvSpPr>
-            <p:cNvPr id="5" name="object 5"/>
+            <p:cNvPr id="5" name="object 5" descr=""/>
             <p:cNvSpPr/>
             <p:nvPr/>
           </p:nvSpPr>
@@ -6733,10 +6723,10 @@
                     <a:pt x="0" y="0"/>
                   </a:lnTo>
                   <a:lnTo>
-                    <a:pt x="2032040" y="0"/>
+                    <a:pt x="2032038" y="0"/>
                   </a:lnTo>
                   <a:lnTo>
-                    <a:pt x="2032040" y="5060"/>
+                    <a:pt x="2032038" y="5060"/>
                   </a:lnTo>
                   <a:lnTo>
                     <a:pt x="0" y="5060"/>
@@ -6786,7 +6776,7 @@
       </p:grpSpPr>
       <p:sp>
         <p:nvSpPr>
-          <p:cNvPr id="2" name="object 2" descr="$PPTXTitle"/>
+          <p:cNvPr id="2" name="object 2"/>
           <p:cNvSpPr txBox="1">
             <a:spLocks noGrp="1"/>
           </p:cNvSpPr>
@@ -6828,7 +6818,7 @@
       </p:sp>
       <p:graphicFrame>
         <p:nvGraphicFramePr>
-          <p:cNvPr id="3" name="object 3"/>
+          <p:cNvPr id="3" name="object 3" descr=""/>
           <p:cNvGraphicFramePr>
             <a:graphicFrameLocks noGrp="1"/>
           </p:cNvGraphicFramePr>
@@ -7321,7 +7311,7 @@
       </p:graphicFrame>
       <p:sp>
         <p:nvSpPr>
-          <p:cNvPr id="4" name="object 4"/>
+          <p:cNvPr id="4" name="object 4" descr=""/>
           <p:cNvSpPr txBox="1"/>
           <p:nvPr/>
         </p:nvSpPr>
@@ -7825,7 +7815,7 @@
       </p:grpSpPr>
       <p:sp>
         <p:nvSpPr>
-          <p:cNvPr id="2" name="object 2" descr="$PPTXTitle"/>
+          <p:cNvPr id="2" name="object 2"/>
           <p:cNvSpPr txBox="1">
             <a:spLocks noGrp="1"/>
           </p:cNvSpPr>
@@ -7883,7 +7873,7 @@
       </p:sp>
       <p:pic>
         <p:nvPicPr>
-          <p:cNvPr id="3" name="object 3"/>
+          <p:cNvPr id="3" name="object 3" descr=""/>
           <p:cNvPicPr/>
           <p:nvPr/>
         </p:nvPicPr>
@@ -7905,7 +7895,7 @@
       </p:pic>
       <p:sp>
         <p:nvSpPr>
-          <p:cNvPr id="4" name="object 4"/>
+          <p:cNvPr id="4" name="object 4" descr=""/>
           <p:cNvSpPr txBox="1"/>
           <p:nvPr/>
         </p:nvSpPr>
@@ -8259,7 +8249,7 @@
       </p:grpSpPr>
       <p:sp>
         <p:nvSpPr>
-          <p:cNvPr id="2" name="object 2"/>
+          <p:cNvPr id="2" name="object 2" descr=""/>
           <p:cNvSpPr txBox="1"/>
           <p:nvPr/>
         </p:nvSpPr>
@@ -8328,7 +8318,7 @@
       </p:sp>
       <p:grpSp>
         <p:nvGrpSpPr>
-          <p:cNvPr id="3" name="object 3"/>
+          <p:cNvPr id="3" name="object 3" descr=""/>
           <p:cNvGrpSpPr/>
           <p:nvPr/>
         </p:nvGrpSpPr>
@@ -8342,7 +8332,7 @@
         </p:grpSpPr>
         <p:sp>
           <p:nvSpPr>
-            <p:cNvPr id="4" name="object 4"/>
+            <p:cNvPr id="4" name="object 4" descr=""/>
             <p:cNvSpPr/>
             <p:nvPr/>
           </p:nvSpPr>
@@ -8390,7 +8380,7 @@
         </p:sp>
         <p:sp>
           <p:nvSpPr>
-            <p:cNvPr id="5" name="object 5"/>
+            <p:cNvPr id="5" name="object 5" descr=""/>
             <p:cNvSpPr/>
             <p:nvPr/>
           </p:nvSpPr>
@@ -8414,10 +8404,10 @@
                     <a:pt x="0" y="0"/>
                   </a:lnTo>
                   <a:lnTo>
-                    <a:pt x="2438439" y="0"/>
+                    <a:pt x="2438438" y="0"/>
                   </a:lnTo>
                   <a:lnTo>
-                    <a:pt x="2438439" y="5060"/>
+                    <a:pt x="2438438" y="5060"/>
                   </a:lnTo>
                   <a:lnTo>
                     <a:pt x="0" y="5060"/>
@@ -8467,7 +8457,7 @@
       </p:grpSpPr>
       <p:sp>
         <p:nvSpPr>
-          <p:cNvPr id="2" name="object 2" descr="$PPTXTitle"/>
+          <p:cNvPr id="2" name="object 2"/>
           <p:cNvSpPr txBox="1">
             <a:spLocks noGrp="1"/>
           </p:cNvSpPr>
@@ -8541,7 +8531,7 @@
       </p:sp>
       <p:sp>
         <p:nvSpPr>
-          <p:cNvPr id="3" name="object 3"/>
+          <p:cNvPr id="3" name="object 3" descr=""/>
           <p:cNvSpPr txBox="1"/>
           <p:nvPr/>
         </p:nvSpPr>
@@ -9051,7 +9041,7 @@
       </p:sp>
       <p:sp>
         <p:nvSpPr>
-          <p:cNvPr id="4" name="object 4"/>
+          <p:cNvPr id="4" name="object 4" descr=""/>
           <p:cNvSpPr txBox="1"/>
           <p:nvPr/>
         </p:nvSpPr>
@@ -9984,7 +9974,7 @@
       </p:sp>
       <p:sp>
         <p:nvSpPr>
-          <p:cNvPr id="5" name="object 5"/>
+          <p:cNvPr id="5" name="object 5" descr=""/>
           <p:cNvSpPr txBox="1"/>
           <p:nvPr/>
         </p:nvSpPr>
@@ -10050,7 +10040,7 @@
       </p:sp>
       <p:sp>
         <p:nvSpPr>
-          <p:cNvPr id="6" name="object 6"/>
+          <p:cNvPr id="6" name="object 6" descr=""/>
           <p:cNvSpPr txBox="1"/>
           <p:nvPr/>
         </p:nvSpPr>
@@ -10164,7 +10154,7 @@
       </p:grpSpPr>
       <p:sp>
         <p:nvSpPr>
-          <p:cNvPr id="2" name="object 2" descr="$PPTXTitle"/>
+          <p:cNvPr id="2" name="object 2"/>
           <p:cNvSpPr txBox="1">
             <a:spLocks noGrp="1"/>
           </p:cNvSpPr>
@@ -10198,7 +10188,7 @@
       </p:sp>
       <p:sp>
         <p:nvSpPr>
-          <p:cNvPr id="4" name="object 4"/>
+          <p:cNvPr id="4" name="object 4" descr=""/>
           <p:cNvSpPr txBox="1">
             <a:spLocks noGrp="1"/>
           </p:cNvSpPr>
@@ -10248,13 +10238,13 @@
       </p:sp>
       <p:sp>
         <p:nvSpPr>
-          <p:cNvPr id="3" name="object 3"/>
+          <p:cNvPr id="3" name="object 3" descr=""/>
           <p:cNvSpPr txBox="1"/>
           <p:nvPr/>
         </p:nvSpPr>
         <p:spPr>
           <a:xfrm>
-            <a:off x="448157" y="1113012"/>
+            <a:off x="448157" y="1113013"/>
             <a:ext cx="3710940" cy="1205230"/>
           </a:xfrm>
           <a:prstGeom prst="rect">
@@ -11083,7 +11073,7 @@
       </p:grpSpPr>
       <p:sp>
         <p:nvSpPr>
-          <p:cNvPr id="2" name="object 2" descr="$PPTXTitle"/>
+          <p:cNvPr id="2" name="object 2"/>
           <p:cNvSpPr txBox="1">
             <a:spLocks noGrp="1"/>
           </p:cNvSpPr>
@@ -11125,7 +11115,7 @@
       </p:sp>
       <p:sp>
         <p:nvSpPr>
-          <p:cNvPr id="4" name="object 4"/>
+          <p:cNvPr id="4" name="object 4" descr=""/>
           <p:cNvSpPr txBox="1">
             <a:spLocks noGrp="1"/>
           </p:cNvSpPr>
@@ -11175,7 +11165,7 @@
       </p:sp>
       <p:sp>
         <p:nvSpPr>
-          <p:cNvPr id="3" name="object 3"/>
+          <p:cNvPr id="3" name="object 3" descr=""/>
           <p:cNvSpPr txBox="1"/>
           <p:nvPr/>
         </p:nvSpPr>
@@ -11450,7 +11440,7 @@
       </p:grpSpPr>
       <p:sp>
         <p:nvSpPr>
-          <p:cNvPr id="2" name="object 2" descr="$PPTXTitle"/>
+          <p:cNvPr id="2" name="object 2"/>
           <p:cNvSpPr txBox="1">
             <a:spLocks noGrp="1"/>
           </p:cNvSpPr>
@@ -11494,7 +11484,7 @@
       </p:sp>
       <p:sp>
         <p:nvSpPr>
-          <p:cNvPr id="4" name="object 4"/>
+          <p:cNvPr id="4" name="object 4" descr=""/>
           <p:cNvSpPr txBox="1">
             <a:spLocks noGrp="1"/>
           </p:cNvSpPr>
@@ -11544,7 +11534,7 @@
       </p:sp>
       <p:sp>
         <p:nvSpPr>
-          <p:cNvPr id="3" name="object 3"/>
+          <p:cNvPr id="3" name="object 3" descr=""/>
           <p:cNvSpPr txBox="1"/>
           <p:nvPr/>
         </p:nvSpPr>
@@ -11638,7 +11628,7 @@
       </p:grpSpPr>
       <p:sp>
         <p:nvSpPr>
-          <p:cNvPr id="2" name="object 2"/>
+          <p:cNvPr id="2" name="object 2" descr=""/>
           <p:cNvSpPr txBox="1"/>
           <p:nvPr/>
         </p:nvSpPr>
@@ -11685,7 +11675,7 @@
       </p:sp>
       <p:grpSp>
         <p:nvGrpSpPr>
-          <p:cNvPr id="3" name="object 3"/>
+          <p:cNvPr id="3" name="object 3" descr=""/>
           <p:cNvGrpSpPr/>
           <p:nvPr/>
         </p:nvGrpSpPr>
@@ -11699,7 +11689,7 @@
         </p:grpSpPr>
         <p:sp>
           <p:nvSpPr>
-            <p:cNvPr id="4" name="object 4"/>
+            <p:cNvPr id="4" name="object 4" descr=""/>
             <p:cNvSpPr/>
             <p:nvPr/>
           </p:nvSpPr>
@@ -11747,7 +11737,7 @@
         </p:sp>
         <p:sp>
           <p:nvSpPr>
-            <p:cNvPr id="5" name="object 5"/>
+            <p:cNvPr id="5" name="object 5" descr=""/>
             <p:cNvSpPr/>
             <p:nvPr/>
           </p:nvSpPr>
@@ -11771,10 +11761,10 @@
                     <a:pt x="0" y="0"/>
                   </a:lnTo>
                   <a:lnTo>
-                    <a:pt x="203199" y="0"/>
+                    <a:pt x="203198" y="0"/>
                   </a:lnTo>
                   <a:lnTo>
-                    <a:pt x="203199" y="5060"/>
+                    <a:pt x="203198" y="5060"/>
                   </a:lnTo>
                   <a:lnTo>
                     <a:pt x="0" y="5060"/>
@@ -11824,7 +11814,7 @@
       </p:grpSpPr>
       <p:sp>
         <p:nvSpPr>
-          <p:cNvPr id="2" name="object 2" descr="$PPTXTitle"/>
+          <p:cNvPr id="2" name="object 2"/>
           <p:cNvSpPr txBox="1">
             <a:spLocks noGrp="1"/>
           </p:cNvSpPr>
@@ -11866,7 +11856,7 @@
       </p:sp>
       <p:sp>
         <p:nvSpPr>
-          <p:cNvPr id="3" name="object 3"/>
+          <p:cNvPr id="3" name="object 3" descr=""/>
           <p:cNvSpPr txBox="1"/>
           <p:nvPr/>
         </p:nvSpPr>
@@ -13073,7 +13063,7 @@
       </p:grpSpPr>
       <p:sp>
         <p:nvSpPr>
-          <p:cNvPr id="2" name="object 2"/>
+          <p:cNvPr id="2" name="object 2" descr=""/>
           <p:cNvSpPr/>
           <p:nvPr/>
         </p:nvSpPr>
@@ -13121,7 +13111,7 @@
       </p:sp>
       <p:sp>
         <p:nvSpPr>
-          <p:cNvPr id="3" name="object 3"/>
+          <p:cNvPr id="3" name="object 3" descr=""/>
           <p:cNvSpPr txBox="1"/>
           <p:nvPr/>
         </p:nvSpPr>
@@ -13187,7 +13177,7 @@
       </p:sp>
       <p:pic>
         <p:nvPicPr>
-          <p:cNvPr id="4" name="object 4"/>
+          <p:cNvPr id="4" name="object 4" descr=""/>
           <p:cNvPicPr/>
           <p:nvPr/>
         </p:nvPicPr>
@@ -13209,7 +13199,7 @@
       </p:pic>
       <p:sp>
         <p:nvSpPr>
-          <p:cNvPr id="5" name="object 5"/>
+          <p:cNvPr id="5" name="object 5" descr=""/>
           <p:cNvSpPr txBox="1"/>
           <p:nvPr/>
         </p:nvSpPr>
@@ -13483,7 +13473,7 @@
       </p:grpSpPr>
       <p:sp>
         <p:nvSpPr>
-          <p:cNvPr id="2" name="object 2" descr="$PPTXTitle"/>
+          <p:cNvPr id="2" name="object 2"/>
           <p:cNvSpPr txBox="1">
             <a:spLocks noGrp="1"/>
           </p:cNvSpPr>
@@ -13525,7 +13515,7 @@
       </p:sp>
       <p:sp>
         <p:nvSpPr>
-          <p:cNvPr id="3" name="object 3"/>
+          <p:cNvPr id="3" name="object 3" descr=""/>
           <p:cNvSpPr txBox="1">
             <a:spLocks noGrp="1"/>
           </p:cNvSpPr>
@@ -13826,13 +13816,13 @@
       </p:sp>
       <p:sp>
         <p:nvSpPr>
-          <p:cNvPr id="4" name="object 4"/>
+          <p:cNvPr id="4" name="object 4" descr=""/>
           <p:cNvSpPr txBox="1"/>
           <p:nvPr/>
         </p:nvSpPr>
         <p:spPr>
           <a:xfrm>
-            <a:off x="3150235" y="879929"/>
+            <a:off x="3150235" y="879930"/>
             <a:ext cx="2319655" cy="1289050"/>
           </a:xfrm>
           <a:prstGeom prst="rect">
@@ -14213,7 +14203,7 @@
       </p:grpSpPr>
       <p:sp>
         <p:nvSpPr>
-          <p:cNvPr id="2" name="object 2"/>
+          <p:cNvPr id="2" name="object 2" descr=""/>
           <p:cNvSpPr txBox="1"/>
           <p:nvPr/>
         </p:nvSpPr>
@@ -14260,7 +14250,7 @@
       </p:sp>
       <p:grpSp>
         <p:nvGrpSpPr>
-          <p:cNvPr id="3" name="object 3"/>
+          <p:cNvPr id="3" name="object 3" descr=""/>
           <p:cNvGrpSpPr/>
           <p:nvPr/>
         </p:nvGrpSpPr>
@@ -14274,7 +14264,7 @@
         </p:grpSpPr>
         <p:sp>
           <p:nvSpPr>
-            <p:cNvPr id="4" name="object 4"/>
+            <p:cNvPr id="4" name="object 4" descr=""/>
             <p:cNvSpPr/>
             <p:nvPr/>
           </p:nvSpPr>
@@ -14322,7 +14312,7 @@
         </p:sp>
         <p:sp>
           <p:nvSpPr>
-            <p:cNvPr id="5" name="object 5"/>
+            <p:cNvPr id="5" name="object 5" descr=""/>
             <p:cNvSpPr/>
             <p:nvPr/>
           </p:nvSpPr>
@@ -14399,7 +14389,7 @@
       </p:grpSpPr>
       <p:sp>
         <p:nvSpPr>
-          <p:cNvPr id="2" name="object 2" descr="$PPTXTitle"/>
+          <p:cNvPr id="2" name="object 2"/>
           <p:cNvSpPr txBox="1">
             <a:spLocks noGrp="1"/>
           </p:cNvSpPr>
@@ -14457,7 +14447,7 @@
       </p:sp>
       <p:sp>
         <p:nvSpPr>
-          <p:cNvPr id="3" name="object 3"/>
+          <p:cNvPr id="3" name="object 3" descr=""/>
           <p:cNvSpPr txBox="1"/>
           <p:nvPr/>
         </p:nvSpPr>
@@ -15047,7 +15037,27 @@
                 <a:latin typeface="Calibri"/>
                 <a:cs typeface="Calibri"/>
               </a:rPr>
-              <a:t>16̇</a:t>
+              <a:t>1</a:t>
+            </a:r>
+            <a:r>
+              <a:rPr dirty="0" sz="1100" i="1">
+                <a:solidFill>
+                  <a:srgbClr val="22373A"/>
+                </a:solidFill>
+                <a:latin typeface="Arial"/>
+                <a:cs typeface="Arial"/>
+              </a:rPr>
+              <a:t>.</a:t>
+            </a:r>
+            <a:r>
+              <a:rPr dirty="0" sz="1100">
+                <a:solidFill>
+                  <a:srgbClr val="22373A"/>
+                </a:solidFill>
+                <a:latin typeface="Calibri"/>
+                <a:cs typeface="Calibri"/>
+              </a:rPr>
+              <a:t>6</a:t>
             </a:r>
             <a:r>
               <a:rPr dirty="0" sz="1100" spc="110">
@@ -15578,24 +15588,34 @@
               <a:t>Scale:</a:t>
             </a:r>
             <a:r>
-              <a:rPr dirty="0" sz="1100" spc="270" b="1">
-                <a:solidFill>
-                  <a:srgbClr val="22373A"/>
-                </a:solidFill>
-                <a:latin typeface="Calibri"/>
-                <a:cs typeface="Calibri"/>
-              </a:rPr>
-              <a:t> </a:t>
-            </a:r>
-            <a:r>
-              <a:rPr dirty="0" sz="1100" spc="-30">
-                <a:solidFill>
-                  <a:srgbClr val="22373A"/>
-                </a:solidFill>
-                <a:latin typeface="Calibri"/>
-                <a:cs typeface="Calibri"/>
-              </a:rPr>
-              <a:t>2010–</a:t>
+              <a:rPr dirty="0" sz="1100" spc="260" b="1">
+                <a:solidFill>
+                  <a:srgbClr val="22373A"/>
+                </a:solidFill>
+                <a:latin typeface="Calibri"/>
+                <a:cs typeface="Calibri"/>
+              </a:rPr>
+              <a:t> </a:t>
+            </a:r>
+            <a:r>
+              <a:rPr dirty="0" sz="1100" spc="-10">
+                <a:solidFill>
+                  <a:srgbClr val="22373A"/>
+                </a:solidFill>
+                <a:latin typeface="Calibri"/>
+                <a:cs typeface="Calibri"/>
+              </a:rPr>
+              <a:t>2010–2025</a:t>
+            </a:r>
+            <a:r>
+              <a:rPr dirty="0" sz="1100" spc="135">
+                <a:solidFill>
+                  <a:srgbClr val="22373A"/>
+                </a:solidFill>
+                <a:latin typeface="Calibri"/>
+                <a:cs typeface="Calibri"/>
+              </a:rPr>
+              <a:t> </a:t>
             </a:r>
             <a:r>
               <a:rPr dirty="0" sz="1100">
@@ -15605,7 +15625,47 @@
                 <a:latin typeface="Calibri"/>
                 <a:cs typeface="Calibri"/>
               </a:rPr>
-              <a:t>2025</a:t>
+              <a:t>supported;</a:t>
+            </a:r>
+            <a:r>
+              <a:rPr dirty="0" sz="1100" spc="135">
+                <a:solidFill>
+                  <a:srgbClr val="22373A"/>
+                </a:solidFill>
+                <a:latin typeface="Calibri"/>
+                <a:cs typeface="Calibri"/>
+              </a:rPr>
+              <a:t> </a:t>
+            </a:r>
+            <a:r>
+              <a:rPr dirty="0" sz="1100" spc="45">
+                <a:solidFill>
+                  <a:srgbClr val="22373A"/>
+                </a:solidFill>
+                <a:latin typeface="Calibri"/>
+                <a:cs typeface="Calibri"/>
+              </a:rPr>
+              <a:t>default</a:t>
+            </a:r>
+            <a:r>
+              <a:rPr dirty="0" sz="1100" spc="135">
+                <a:solidFill>
+                  <a:srgbClr val="22373A"/>
+                </a:solidFill>
+                <a:latin typeface="Calibri"/>
+                <a:cs typeface="Calibri"/>
+              </a:rPr>
+              <a:t> </a:t>
+            </a:r>
+            <a:r>
+              <a:rPr dirty="0" sz="1100" spc="60">
+                <a:solidFill>
+                  <a:srgbClr val="22373A"/>
+                </a:solidFill>
+                <a:latin typeface="Calibri"/>
+                <a:cs typeface="Calibri"/>
+              </a:rPr>
+              <a:t>pull</a:t>
             </a:r>
             <a:r>
               <a:rPr dirty="0" sz="1100" spc="140">
@@ -15618,6 +15678,16 @@
               <a:t> </a:t>
             </a:r>
             <a:r>
+              <a:rPr dirty="0" sz="1100" spc="-10">
+                <a:solidFill>
+                  <a:srgbClr val="22373A"/>
+                </a:solidFill>
+                <a:latin typeface="Calibri"/>
+                <a:cs typeface="Calibri"/>
+              </a:rPr>
+              <a:t>2022-</a:t>
+            </a:r>
+            <a:r>
               <a:rPr dirty="0" sz="1100">
                 <a:solidFill>
                   <a:srgbClr val="22373A"/>
@@ -15625,50 +15695,30 @@
                 <a:latin typeface="Calibri"/>
                 <a:cs typeface="Calibri"/>
               </a:rPr>
-              <a:t>supported;</a:t>
-            </a:r>
-            <a:r>
-              <a:rPr dirty="0" sz="1100" spc="145">
-                <a:solidFill>
-                  <a:srgbClr val="22373A"/>
-                </a:solidFill>
-                <a:latin typeface="Calibri"/>
-                <a:cs typeface="Calibri"/>
-              </a:rPr>
-              <a:t> </a:t>
-            </a:r>
-            <a:r>
-              <a:rPr dirty="0" sz="1100" spc="45">
-                <a:solidFill>
-                  <a:srgbClr val="22373A"/>
-                </a:solidFill>
-                <a:latin typeface="Calibri"/>
-                <a:cs typeface="Calibri"/>
-              </a:rPr>
-              <a:t>default</a:t>
-            </a:r>
-            <a:r>
-              <a:rPr dirty="0" sz="1100" spc="140">
-                <a:solidFill>
-                  <a:srgbClr val="22373A"/>
-                </a:solidFill>
-                <a:latin typeface="Calibri"/>
-                <a:cs typeface="Calibri"/>
-              </a:rPr>
-              <a:t> </a:t>
-            </a:r>
-            <a:r>
-              <a:rPr dirty="0" sz="1100" spc="60">
-                <a:solidFill>
-                  <a:srgbClr val="22373A"/>
-                </a:solidFill>
-                <a:latin typeface="Calibri"/>
-                <a:cs typeface="Calibri"/>
-              </a:rPr>
-              <a:t>pull</a:t>
-            </a:r>
-            <a:r>
-              <a:rPr dirty="0" sz="1100" spc="140">
+              <a:t>01</a:t>
+            </a:r>
+            <a:r>
+              <a:rPr dirty="0" sz="1100" spc="135">
+                <a:solidFill>
+                  <a:srgbClr val="22373A"/>
+                </a:solidFill>
+                <a:latin typeface="Calibri"/>
+                <a:cs typeface="Calibri"/>
+              </a:rPr>
+              <a:t> </a:t>
+            </a:r>
+            <a:r>
+              <a:rPr dirty="0" sz="1100">
+                <a:solidFill>
+                  <a:srgbClr val="22373A"/>
+                </a:solidFill>
+                <a:latin typeface="Calibri"/>
+                <a:cs typeface="Calibri"/>
+              </a:rPr>
+              <a:t>→</a:t>
+            </a:r>
+            <a:r>
+              <a:rPr dirty="0" sz="1100" spc="135">
                 <a:solidFill>
                   <a:srgbClr val="22373A"/>
                 </a:solidFill>
@@ -15685,7 +15735,27 @@
                 <a:latin typeface="Calibri"/>
                 <a:cs typeface="Calibri"/>
               </a:rPr>
-              <a:t>2022-</a:t>
+              <a:t>2024-</a:t>
+            </a:r>
+            <a:r>
+              <a:rPr dirty="0" sz="1100" spc="-35">
+                <a:solidFill>
+                  <a:srgbClr val="22373A"/>
+                </a:solidFill>
+                <a:latin typeface="Calibri"/>
+                <a:cs typeface="Calibri"/>
+              </a:rPr>
+              <a:t>12;</a:t>
+            </a:r>
+            <a:r>
+              <a:rPr dirty="0" sz="1100" spc="135">
+                <a:solidFill>
+                  <a:srgbClr val="22373A"/>
+                </a:solidFill>
+                <a:latin typeface="Calibri"/>
+                <a:cs typeface="Calibri"/>
+              </a:rPr>
+              <a:t> </a:t>
             </a:r>
             <a:r>
               <a:rPr dirty="0" sz="1100">
@@ -15695,76 +15765,6 @@
                 <a:latin typeface="Calibri"/>
                 <a:cs typeface="Calibri"/>
               </a:rPr>
-              <a:t>01</a:t>
-            </a:r>
-            <a:r>
-              <a:rPr dirty="0" sz="1100" spc="145">
-                <a:solidFill>
-                  <a:srgbClr val="22373A"/>
-                </a:solidFill>
-                <a:latin typeface="Calibri"/>
-                <a:cs typeface="Calibri"/>
-              </a:rPr>
-              <a:t> </a:t>
-            </a:r>
-            <a:r>
-              <a:rPr dirty="0" sz="1100">
-                <a:solidFill>
-                  <a:srgbClr val="22373A"/>
-                </a:solidFill>
-                <a:latin typeface="Calibri"/>
-                <a:cs typeface="Calibri"/>
-              </a:rPr>
-              <a:t>→</a:t>
-            </a:r>
-            <a:r>
-              <a:rPr dirty="0" sz="1100" spc="140">
-                <a:solidFill>
-                  <a:srgbClr val="22373A"/>
-                </a:solidFill>
-                <a:latin typeface="Calibri"/>
-                <a:cs typeface="Calibri"/>
-              </a:rPr>
-              <a:t> </a:t>
-            </a:r>
-            <a:r>
-              <a:rPr dirty="0" sz="1100" spc="-10">
-                <a:solidFill>
-                  <a:srgbClr val="22373A"/>
-                </a:solidFill>
-                <a:latin typeface="Calibri"/>
-                <a:cs typeface="Calibri"/>
-              </a:rPr>
-              <a:t>2024-</a:t>
-            </a:r>
-            <a:r>
-              <a:rPr dirty="0" sz="1100" spc="-35">
-                <a:solidFill>
-                  <a:srgbClr val="22373A"/>
-                </a:solidFill>
-                <a:latin typeface="Calibri"/>
-                <a:cs typeface="Calibri"/>
-              </a:rPr>
-              <a:t>12;</a:t>
-            </a:r>
-            <a:r>
-              <a:rPr dirty="0" sz="1100" spc="145">
-                <a:solidFill>
-                  <a:srgbClr val="22373A"/>
-                </a:solidFill>
-                <a:latin typeface="Calibri"/>
-                <a:cs typeface="Calibri"/>
-              </a:rPr>
-              <a:t> </a:t>
-            </a:r>
-            <a:r>
-              <a:rPr dirty="0" sz="1100">
-                <a:solidFill>
-                  <a:srgbClr val="22373A"/>
-                </a:solidFill>
-                <a:latin typeface="Calibri"/>
-                <a:cs typeface="Calibri"/>
-              </a:rPr>
               <a:t>quick-</a:t>
             </a:r>
             <a:r>
@@ -15778,7 +15778,7 @@
               <a:t>start</a:t>
             </a:r>
             <a:r>
-              <a:rPr dirty="0" sz="1100" spc="140">
+              <a:rPr dirty="0" sz="1100" spc="135">
                 <a:solidFill>
                   <a:srgbClr val="22373A"/>
                 </a:solidFill>
@@ -16188,7 +16188,7 @@
       </p:grpSpPr>
       <p:sp>
         <p:nvSpPr>
-          <p:cNvPr id="2" name="object 2" descr="$PPTXTitle"/>
+          <p:cNvPr id="2" name="object 2"/>
           <p:cNvSpPr txBox="1">
             <a:spLocks noGrp="1"/>
           </p:cNvSpPr>
@@ -16238,7 +16238,7 @@
       </p:sp>
       <p:sp>
         <p:nvSpPr>
-          <p:cNvPr id="6" name="object 6"/>
+          <p:cNvPr id="6" name="object 6" descr=""/>
           <p:cNvSpPr txBox="1">
             <a:spLocks noGrp="1"/>
           </p:cNvSpPr>
@@ -16288,7 +16288,7 @@
       </p:sp>
       <p:sp>
         <p:nvSpPr>
-          <p:cNvPr id="3" name="object 3"/>
+          <p:cNvPr id="3" name="object 3" descr=""/>
           <p:cNvSpPr txBox="1"/>
           <p:nvPr/>
         </p:nvSpPr>
@@ -16550,7 +16550,7 @@
       </p:sp>
       <p:sp>
         <p:nvSpPr>
-          <p:cNvPr id="4" name="object 4"/>
+          <p:cNvPr id="4" name="object 4" descr=""/>
           <p:cNvSpPr txBox="1"/>
           <p:nvPr/>
         </p:nvSpPr>
@@ -16664,17 +16664,7 @@
                 <a:latin typeface="Calibri"/>
                 <a:cs typeface="Calibri"/>
               </a:rPr>
-              <a:t>,</a:t>
-            </a:r>
-            <a:r>
-              <a:rPr dirty="0" sz="1100" spc="-5">
-                <a:solidFill>
-                  <a:srgbClr val="22373A"/>
-                </a:solidFill>
-                <a:latin typeface="Calibri"/>
-                <a:cs typeface="Calibri"/>
-              </a:rPr>
-              <a:t> </a:t>
+              <a:t>, </a:t>
             </a:r>
             <a:r>
               <a:rPr dirty="0" sz="1100" spc="-10">
@@ -16842,7 +16832,7 @@
       </p:sp>
       <p:sp>
         <p:nvSpPr>
-          <p:cNvPr id="5" name="object 5"/>
+          <p:cNvPr id="5" name="object 5" descr=""/>
           <p:cNvSpPr txBox="1"/>
           <p:nvPr/>
         </p:nvSpPr>
